--- a/ai-eng-nbs-1-master/First_Class.pptx
+++ b/ai-eng-nbs-1-master/First_Class.pptx
@@ -5,7 +5,7 @@
     <p:sldMasterId id="2147483686" r:id="rId1"/>
   </p:sldMasterIdLst>
   <p:notesMasterIdLst>
-    <p:notesMasterId r:id="rId14"/>
+    <p:notesMasterId r:id="rId18"/>
   </p:notesMasterIdLst>
   <p:sldIdLst>
     <p:sldId id="256" r:id="rId2"/>
@@ -20,6 +20,10 @@
     <p:sldId id="270" r:id="rId11"/>
     <p:sldId id="258" r:id="rId12"/>
     <p:sldId id="271" r:id="rId13"/>
+    <p:sldId id="272" r:id="rId14"/>
+    <p:sldId id="274" r:id="rId15"/>
+    <p:sldId id="273" r:id="rId16"/>
+    <p:sldId id="275" r:id="rId17"/>
   </p:sldIdLst>
   <p:sldSz cx="12192000" cy="6858000"/>
   <p:notesSz cx="6858000" cy="9144000"/>
@@ -118,6 +122,11 @@
       </a:defRPr>
     </a:lvl9pPr>
   </p:defaultTextStyle>
+  <p:extLst>
+    <p:ext uri="{EFAFB233-063F-42B5-8137-9DF3F51BA10A}">
+      <p15:sldGuideLst xmlns:p15="http://schemas.microsoft.com/office/powerpoint/2012/main"/>
+    </p:ext>
+  </p:extLst>
 </p:presentation>
 </file>
 
@@ -203,7 +212,7 @@
           <a:p>
             <a:fld id="{965227BC-2EBA-284B-8361-900FA3149BB5}" type="datetimeFigureOut">
               <a:rPr lang="en-US" smtClean="0"/>
-              <a:t>2/4/25</a:t>
+              <a:t>2/14/25</a:t>
             </a:fld>
             <a:endParaRPr lang="en-US"/>
           </a:p>
@@ -2275,7 +2284,7 @@
           <a:p>
             <a:fld id="{E7736193-EDE3-4BB5-AE5F-E6E5472AB8BE}" type="datetimeFigureOut">
               <a:rPr lang="en-US" smtClean="0"/>
-              <a:t>2/4/25</a:t>
+              <a:t>2/14/25</a:t>
             </a:fld>
             <a:endParaRPr lang="en-US"/>
           </a:p>
@@ -2523,7 +2532,7 @@
           <a:p>
             <a:fld id="{E7736193-EDE3-4BB5-AE5F-E6E5472AB8BE}" type="datetimeFigureOut">
               <a:rPr lang="en-US" smtClean="0"/>
-              <a:t>2/4/25</a:t>
+              <a:t>2/14/25</a:t>
             </a:fld>
             <a:endParaRPr lang="en-US"/>
           </a:p>
@@ -2731,7 +2740,7 @@
           <a:p>
             <a:fld id="{E7736193-EDE3-4BB5-AE5F-E6E5472AB8BE}" type="datetimeFigureOut">
               <a:rPr lang="en-US" smtClean="0"/>
-              <a:t>2/4/25</a:t>
+              <a:t>2/14/25</a:t>
             </a:fld>
             <a:endParaRPr lang="en-US"/>
           </a:p>
@@ -2929,7 +2938,7 @@
           <a:p>
             <a:fld id="{E7736193-EDE3-4BB5-AE5F-E6E5472AB8BE}" type="datetimeFigureOut">
               <a:rPr lang="en-US" smtClean="0"/>
-              <a:t>2/4/25</a:t>
+              <a:t>2/14/25</a:t>
             </a:fld>
             <a:endParaRPr lang="en-US"/>
           </a:p>
@@ -3206,7 +3215,7 @@
           <a:p>
             <a:fld id="{E7736193-EDE3-4BB5-AE5F-E6E5472AB8BE}" type="datetimeFigureOut">
               <a:rPr lang="en-US" smtClean="0"/>
-              <a:t>2/4/25</a:t>
+              <a:t>2/14/25</a:t>
             </a:fld>
             <a:endParaRPr lang="en-US"/>
           </a:p>
@@ -3476,7 +3485,7 @@
           <a:p>
             <a:fld id="{E7736193-EDE3-4BB5-AE5F-E6E5472AB8BE}" type="datetimeFigureOut">
               <a:rPr lang="en-US" smtClean="0"/>
-              <a:t>2/4/25</a:t>
+              <a:t>2/14/25</a:t>
             </a:fld>
             <a:endParaRPr lang="en-US"/>
           </a:p>
@@ -3892,7 +3901,7 @@
           <a:p>
             <a:fld id="{E7736193-EDE3-4BB5-AE5F-E6E5472AB8BE}" type="datetimeFigureOut">
               <a:rPr lang="en-US" smtClean="0"/>
-              <a:t>2/4/25</a:t>
+              <a:t>2/14/25</a:t>
             </a:fld>
             <a:endParaRPr lang="en-US"/>
           </a:p>
@@ -4125,7 +4134,7 @@
           <a:p>
             <a:fld id="{E7736193-EDE3-4BB5-AE5F-E6E5472AB8BE}" type="datetimeFigureOut">
               <a:rPr lang="en-US" smtClean="0"/>
-              <a:t>2/4/25</a:t>
+              <a:t>2/14/25</a:t>
             </a:fld>
             <a:endParaRPr lang="en-US"/>
           </a:p>
@@ -4238,7 +4247,7 @@
           <a:p>
             <a:fld id="{E7736193-EDE3-4BB5-AE5F-E6E5472AB8BE}" type="datetimeFigureOut">
               <a:rPr lang="en-US" smtClean="0"/>
-              <a:t>2/4/25</a:t>
+              <a:t>2/14/25</a:t>
             </a:fld>
             <a:endParaRPr lang="en-US"/>
           </a:p>
@@ -4555,7 +4564,7 @@
           <a:p>
             <a:fld id="{E7736193-EDE3-4BB5-AE5F-E6E5472AB8BE}" type="datetimeFigureOut">
               <a:rPr lang="en-US" smtClean="0"/>
-              <a:t>2/4/25</a:t>
+              <a:t>2/14/25</a:t>
             </a:fld>
             <a:endParaRPr lang="en-US"/>
           </a:p>
@@ -4908,7 +4917,7 @@
           <a:p>
             <a:fld id="{E7736193-EDE3-4BB5-AE5F-E6E5472AB8BE}" type="datetimeFigureOut">
               <a:rPr lang="en-US" smtClean="0"/>
-              <a:t>2/4/25</a:t>
+              <a:t>2/14/25</a:t>
             </a:fld>
             <a:endParaRPr lang="en-US"/>
           </a:p>
@@ -5206,7 +5215,7 @@
           <a:p>
             <a:fld id="{E7736193-EDE3-4BB5-AE5F-E6E5472AB8BE}" type="datetimeFigureOut">
               <a:rPr lang="en-US" smtClean="0"/>
-              <a:t>2/4/25</a:t>
+              <a:t>2/14/25</a:t>
             </a:fld>
             <a:endParaRPr lang="en-US"/>
           </a:p>
@@ -6647,7 +6656,7 @@
       </p:grpSpPr>
       <p:sp>
         <p:nvSpPr>
-          <p:cNvPr id="15" name="Rectangle 14">
+          <p:cNvPr id="1031" name="Rectangle 1030">
             <a:extLst>
               <a:ext uri="{FF2B5EF4-FFF2-40B4-BE49-F238E27FC236}">
                 <a16:creationId xmlns:a16="http://schemas.microsoft.com/office/drawing/2014/main" id="{5BE2A49E-0BD9-321C-F602-AFA2FCF9B27B}"/>
@@ -6713,7 +6722,7 @@
       </p:sp>
       <p:sp useBgFill="1">
         <p:nvSpPr>
-          <p:cNvPr id="16" name="Rectangle 15">
+          <p:cNvPr id="1033" name="Rectangle 1032">
             <a:extLst>
               <a:ext uri="{FF2B5EF4-FFF2-40B4-BE49-F238E27FC236}">
                 <a16:creationId xmlns:a16="http://schemas.microsoft.com/office/drawing/2014/main" id="{2D0267C2-9A87-5888-0384-969AD9365463}"/>
@@ -6776,7 +6785,7 @@
       </p:sp>
       <p:sp>
         <p:nvSpPr>
-          <p:cNvPr id="17" name="Rectangle 16">
+          <p:cNvPr id="1035" name="Rectangle 1034">
             <a:extLst>
               <a:ext uri="{FF2B5EF4-FFF2-40B4-BE49-F238E27FC236}">
                 <a16:creationId xmlns:a16="http://schemas.microsoft.com/office/drawing/2014/main" id="{E4AEFA6A-E623-CF1A-3DDF-C38D3A7E2CE2}"/>
@@ -6858,8 +6867,8 @@
         </p:nvSpPr>
         <p:spPr>
           <a:xfrm>
-            <a:off x="938570" y="2771774"/>
-            <a:ext cx="3355901" cy="1828800"/>
+            <a:off x="1130845" y="1162591"/>
+            <a:ext cx="3355901" cy="1828798"/>
           </a:xfrm>
         </p:spPr>
         <p:txBody>
@@ -6875,36 +6884,6 @@
           </a:p>
         </p:txBody>
       </p:sp>
-      <p:pic>
-        <p:nvPicPr>
-          <p:cNvPr id="4" name="Picture 3" descr="A person and a child talking&#10;&#10;AI-generated content may be incorrect.">
-            <a:extLst>
-              <a:ext uri="{FF2B5EF4-FFF2-40B4-BE49-F238E27FC236}">
-                <a16:creationId xmlns:a16="http://schemas.microsoft.com/office/drawing/2014/main" id="{194ECBD1-3B89-4BE1-1F15-3C8DA3E70BAF}"/>
-              </a:ext>
-            </a:extLst>
-          </p:cNvPr>
-          <p:cNvPicPr>
-            <a:picLocks noChangeAspect="1"/>
-          </p:cNvPicPr>
-          <p:nvPr/>
-        </p:nvPicPr>
-        <p:blipFill>
-          <a:blip r:embed="rId2"/>
-          <a:stretch>
-            <a:fillRect/>
-          </a:stretch>
-        </p:blipFill>
-        <p:spPr>
-          <a:xfrm>
-            <a:off x="5586770" y="1885362"/>
-            <a:ext cx="5690830" cy="3087275"/>
-          </a:xfrm>
-          <a:prstGeom prst="rect">
-            <a:avLst/>
-          </a:prstGeom>
-        </p:spPr>
-      </p:pic>
       <p:pic>
         <p:nvPicPr>
           <p:cNvPr id="1026" name="Picture 2" descr="Wax On, Wax Off: The Way to Movement Mastery? | Football Beyond The Stats">
@@ -6920,22 +6899,21 @@
           <p:nvPr/>
         </p:nvPicPr>
         <p:blipFill>
-          <a:blip r:embed="rId3">
+          <a:blip r:embed="rId2">
             <a:extLst>
               <a:ext uri="{28A0092B-C50C-407E-A947-70E740481C1C}">
                 <a14:useLocalDpi xmlns:a14="http://schemas.microsoft.com/office/drawing/2010/main" val="0"/>
               </a:ext>
             </a:extLst>
           </a:blip>
-          <a:srcRect/>
           <a:stretch>
             <a:fillRect/>
           </a:stretch>
         </p:blipFill>
         <p:spPr bwMode="auto">
           <a:xfrm>
-            <a:off x="5457228" y="1218608"/>
-            <a:ext cx="5995191" cy="4413398"/>
+            <a:off x="6384925" y="3667754"/>
+            <a:ext cx="4046896" cy="2979147"/>
           </a:xfrm>
           <a:prstGeom prst="rect">
             <a:avLst/>
@@ -6952,41 +6930,36 @@
           </a:extLst>
         </p:spPr>
       </p:pic>
-      <p:sp>
-        <p:nvSpPr>
-          <p:cNvPr id="5" name="TextBox 4">
-            <a:extLst>
-              <a:ext uri="{FF2B5EF4-FFF2-40B4-BE49-F238E27FC236}">
-                <a16:creationId xmlns:a16="http://schemas.microsoft.com/office/drawing/2014/main" id="{46BC9664-D90F-0EC1-A002-165B0916F08A}"/>
-              </a:ext>
-            </a:extLst>
-          </p:cNvPr>
-          <p:cNvSpPr txBox="1"/>
+      <p:pic>
+        <p:nvPicPr>
+          <p:cNvPr id="4" name="Picture 3" descr="A person and a child talking&#10;&#10;AI-generated content may be incorrect.">
+            <a:extLst>
+              <a:ext uri="{FF2B5EF4-FFF2-40B4-BE49-F238E27FC236}">
+                <a16:creationId xmlns:a16="http://schemas.microsoft.com/office/drawing/2014/main" id="{194ECBD1-3B89-4BE1-1F15-3C8DA3E70BAF}"/>
+              </a:ext>
+            </a:extLst>
+          </p:cNvPr>
+          <p:cNvPicPr>
+            <a:picLocks noChangeAspect="1"/>
+          </p:cNvPicPr>
           <p:nvPr/>
-        </p:nvSpPr>
-        <p:spPr>
-          <a:xfrm>
-            <a:off x="2998907" y="5550770"/>
-            <a:ext cx="1718740" cy="369332"/>
+        </p:nvPicPr>
+        <p:blipFill>
+          <a:blip r:embed="rId3"/>
+          <a:stretch>
+            <a:fillRect/>
+          </a:stretch>
+        </p:blipFill>
+        <p:spPr>
+          <a:xfrm>
+            <a:off x="5886808" y="709042"/>
+            <a:ext cx="5043130" cy="2735897"/>
           </a:xfrm>
           <a:prstGeom prst="rect">
             <a:avLst/>
           </a:prstGeom>
-          <a:noFill/>
-        </p:spPr>
-        <p:txBody>
-          <a:bodyPr wrap="none" rtlCol="0">
-            <a:spAutoFit/>
-          </a:bodyPr>
-          <a:lstStyle/>
-          <a:p>
-            <a:r>
-              <a:rPr lang="en-US" dirty="0"/>
-              <a:t>In your terminal</a:t>
-            </a:r>
-          </a:p>
-        </p:txBody>
-      </p:sp>
+        </p:spPr>
+      </p:pic>
     </p:spTree>
     <p:extLst>
       <p:ext uri="{BB962C8B-B14F-4D97-AF65-F5344CB8AC3E}">
@@ -7390,10 +7363,10 @@
       </p:sp>
       <p:pic>
         <p:nvPicPr>
-          <p:cNvPr id="3" name="Picture 2">
-            <a:extLst>
-              <a:ext uri="{FF2B5EF4-FFF2-40B4-BE49-F238E27FC236}">
-                <a16:creationId xmlns:a16="http://schemas.microsoft.com/office/drawing/2014/main" id="{49DC0948-E44B-585D-2B43-B7C5C49F5A00}"/>
+          <p:cNvPr id="4" name="Picture 3">
+            <a:extLst>
+              <a:ext uri="{FF2B5EF4-FFF2-40B4-BE49-F238E27FC236}">
+                <a16:creationId xmlns:a16="http://schemas.microsoft.com/office/drawing/2014/main" id="{62942460-4405-655E-4D84-682A3D497189}"/>
               </a:ext>
             </a:extLst>
           </p:cNvPr>
@@ -7410,8 +7383,8 @@
         </p:blipFill>
         <p:spPr>
           <a:xfrm>
-            <a:off x="1639726" y="1035430"/>
-            <a:ext cx="5439933" cy="4787140"/>
+            <a:off x="1575230" y="981074"/>
+            <a:ext cx="5547292" cy="4876089"/>
           </a:xfrm>
           <a:prstGeom prst="rect">
             <a:avLst/>
@@ -7422,6 +7395,2652 @@
     <p:extLst>
       <p:ext uri="{BB962C8B-B14F-4D97-AF65-F5344CB8AC3E}">
         <p14:creationId xmlns:p14="http://schemas.microsoft.com/office/powerpoint/2010/main" val="2432988771"/>
+      </p:ext>
+    </p:extLst>
+  </p:cSld>
+  <p:clrMapOvr>
+    <a:masterClrMapping/>
+  </p:clrMapOvr>
+</p:sld>
+</file>
+
+<file path=ppt/slides/slide13.xml><?xml version="1.0" encoding="utf-8"?>
+<p:sld xmlns:a="http://schemas.openxmlformats.org/drawingml/2006/main" xmlns:r="http://schemas.openxmlformats.org/officeDocument/2006/relationships" xmlns:p="http://schemas.openxmlformats.org/presentationml/2006/main">
+  <p:cSld>
+    <p:bg>
+      <p:bgPr>
+        <a:solidFill>
+          <a:schemeClr val="bg2"/>
+        </a:solidFill>
+        <a:effectLst/>
+      </p:bgPr>
+    </p:bg>
+    <p:spTree>
+      <p:nvGrpSpPr>
+        <p:cNvPr id="1" name=""/>
+        <p:cNvGrpSpPr/>
+        <p:nvPr/>
+      </p:nvGrpSpPr>
+      <p:grpSpPr>
+        <a:xfrm>
+          <a:off x="0" y="0"/>
+          <a:ext cx="0" cy="0"/>
+          <a:chOff x="0" y="0"/>
+          <a:chExt cx="0" cy="0"/>
+        </a:xfrm>
+      </p:grpSpPr>
+      <p:sp>
+        <p:nvSpPr>
+          <p:cNvPr id="1088" name="Rectangle 1087">
+            <a:extLst>
+              <a:ext uri="{FF2B5EF4-FFF2-40B4-BE49-F238E27FC236}">
+                <a16:creationId xmlns:a16="http://schemas.microsoft.com/office/drawing/2014/main" id="{5BE2A49E-0BD9-321C-F602-AFA2FCF9B27B}"/>
+              </a:ext>
+              <a:ext uri="{C183D7F6-B498-43B3-948B-1728B52AA6E4}">
+                <adec:decorative xmlns:adec="http://schemas.microsoft.com/office/drawing/2017/decorative" val="1"/>
+              </a:ext>
+            </a:extLst>
+          </p:cNvPr>
+          <p:cNvSpPr>
+            <a:spLocks noGrp="1" noRot="1" noChangeAspect="1" noMove="1" noResize="1" noEditPoints="1" noAdjustHandles="1" noChangeArrowheads="1" noChangeShapeType="1" noTextEdit="1"/>
+          </p:cNvSpPr>
+          <p:nvPr>
+            <p:extLst>
+              <p:ext uri="{386F3935-93C4-4BCD-93E2-E3B085C9AB24}">
+                <p16:designElem xmlns:p16="http://schemas.microsoft.com/office/powerpoint/2015/main" val="1"/>
+              </p:ext>
+            </p:extLst>
+          </p:nvPr>
+        </p:nvSpPr>
+        <p:spPr>
+          <a:xfrm>
+            <a:off x="933198" y="931857"/>
+            <a:ext cx="10326946" cy="4996302"/>
+          </a:xfrm>
+          <a:prstGeom prst="rect">
+            <a:avLst/>
+          </a:prstGeom>
+          <a:noFill/>
+          <a:ln w="38100">
+            <a:solidFill>
+              <a:schemeClr val="accent1">
+                <a:lumMod val="60000"/>
+                <a:lumOff val="40000"/>
+              </a:schemeClr>
+            </a:solidFill>
+          </a:ln>
+        </p:spPr>
+        <p:style>
+          <a:lnRef idx="2">
+            <a:schemeClr val="accent1">
+              <a:shade val="50000"/>
+            </a:schemeClr>
+          </a:lnRef>
+          <a:fillRef idx="1">
+            <a:schemeClr val="accent1"/>
+          </a:fillRef>
+          <a:effectRef idx="0">
+            <a:schemeClr val="accent1"/>
+          </a:effectRef>
+          <a:fontRef idx="minor">
+            <a:schemeClr val="lt1"/>
+          </a:fontRef>
+        </p:style>
+        <p:txBody>
+          <a:bodyPr rtlCol="0" anchor="ctr"/>
+          <a:lstStyle/>
+          <a:p>
+            <a:pPr algn="ctr"/>
+            <a:endParaRPr lang="en-US"/>
+          </a:p>
+        </p:txBody>
+      </p:sp>
+      <p:sp useBgFill="1">
+        <p:nvSpPr>
+          <p:cNvPr id="1090" name="Rectangle 1089">
+            <a:extLst>
+              <a:ext uri="{FF2B5EF4-FFF2-40B4-BE49-F238E27FC236}">
+                <a16:creationId xmlns:a16="http://schemas.microsoft.com/office/drawing/2014/main" id="{812CB9FF-7D0E-C6EE-FD1E-5414C1C2FEB3}"/>
+              </a:ext>
+              <a:ext uri="{C183D7F6-B498-43B3-948B-1728B52AA6E4}">
+                <adec:decorative xmlns:adec="http://schemas.microsoft.com/office/drawing/2017/decorative" val="1"/>
+              </a:ext>
+            </a:extLst>
+          </p:cNvPr>
+          <p:cNvSpPr>
+            <a:spLocks noGrp="1" noRot="1" noChangeAspect="1" noMove="1" noResize="1" noEditPoints="1" noAdjustHandles="1" noChangeArrowheads="1" noChangeShapeType="1" noTextEdit="1"/>
+          </p:cNvSpPr>
+          <p:nvPr>
+            <p:extLst>
+              <p:ext uri="{386F3935-93C4-4BCD-93E2-E3B085C9AB24}">
+                <p16:designElem xmlns:p16="http://schemas.microsoft.com/office/powerpoint/2015/main" val="1"/>
+              </p:ext>
+            </p:extLst>
+          </p:nvPr>
+        </p:nvSpPr>
+        <p:spPr>
+          <a:xfrm>
+            <a:off x="0" y="0"/>
+            <a:ext cx="12192000" cy="6858000"/>
+          </a:xfrm>
+          <a:prstGeom prst="rect">
+            <a:avLst/>
+          </a:prstGeom>
+          <a:ln w="12700" cap="flat" cmpd="sng" algn="ctr">
+            <a:noFill/>
+            <a:prstDash val="solid"/>
+            <a:miter lim="800000"/>
+          </a:ln>
+          <a:effectLst/>
+          <a:extLst>
+            <a:ext uri="{91240B29-F687-4F45-9708-019B960494DF}">
+              <a14:hiddenLine xmlns:a14="http://schemas.microsoft.com/office/drawing/2010/main" w="12700" cap="flat" cmpd="sng" algn="ctr">
+                <a:solidFill>
+                  <a:schemeClr val="accent1">
+                    <a:shade val="50000"/>
+                  </a:schemeClr>
+                </a:solidFill>
+                <a:prstDash val="solid"/>
+                <a:miter lim="800000"/>
+              </a14:hiddenLine>
+            </a:ext>
+          </a:extLst>
+        </p:spPr>
+        <p:style>
+          <a:lnRef idx="2">
+            <a:schemeClr val="accent1">
+              <a:shade val="50000"/>
+            </a:schemeClr>
+          </a:lnRef>
+          <a:fillRef idx="1">
+            <a:schemeClr val="accent1"/>
+          </a:fillRef>
+          <a:effectRef idx="0">
+            <a:schemeClr val="accent1"/>
+          </a:effectRef>
+          <a:fontRef idx="minor">
+            <a:schemeClr val="lt1"/>
+          </a:fontRef>
+        </p:style>
+        <p:txBody>
+          <a:bodyPr rtlCol="0" anchor="ctr"/>
+          <a:lstStyle/>
+          <a:p>
+            <a:pPr algn="ctr"/>
+            <a:endParaRPr lang="en-US"/>
+          </a:p>
+        </p:txBody>
+      </p:sp>
+      <p:pic>
+        <p:nvPicPr>
+          <p:cNvPr id="1026" name="Picture 2" descr="Marveling at the Soaking Wet Rockettes of the Olympics - The New York Times">
+            <a:extLst>
+              <a:ext uri="{FF2B5EF4-FFF2-40B4-BE49-F238E27FC236}">
+                <a16:creationId xmlns:a16="http://schemas.microsoft.com/office/drawing/2014/main" id="{5C4C493F-CB62-2CDF-5634-CB67CA12A4B1}"/>
+              </a:ext>
+            </a:extLst>
+          </p:cNvPr>
+          <p:cNvPicPr>
+            <a:picLocks noChangeAspect="1" noChangeArrowheads="1"/>
+          </p:cNvPicPr>
+          <p:nvPr/>
+        </p:nvPicPr>
+        <p:blipFill>
+          <a:blip r:embed="rId2">
+            <a:alphaModFix/>
+            <a:extLst>
+              <a:ext uri="{28A0092B-C50C-407E-A947-70E740481C1C}">
+                <a14:useLocalDpi xmlns:a14="http://schemas.microsoft.com/office/drawing/2010/main" val="0"/>
+              </a:ext>
+            </a:extLst>
+          </a:blip>
+          <a:srcRect t="13536" b="2195"/>
+          <a:stretch/>
+        </p:blipFill>
+        <p:spPr bwMode="auto">
+          <a:xfrm>
+            <a:off x="-5113" y="10"/>
+            <a:ext cx="12192000" cy="6857989"/>
+          </a:xfrm>
+          <a:prstGeom prst="rect">
+            <a:avLst/>
+          </a:prstGeom>
+          <a:noFill/>
+          <a:extLst>
+            <a:ext uri="{909E8E84-426E-40DD-AFC4-6F175D3DCCD1}">
+              <a14:hiddenFill xmlns:a14="http://schemas.microsoft.com/office/drawing/2010/main">
+                <a:solidFill>
+                  <a:srgbClr val="FFFFFF"/>
+                </a:solidFill>
+              </a14:hiddenFill>
+            </a:ext>
+          </a:extLst>
+        </p:spPr>
+      </p:pic>
+      <p:sp>
+        <p:nvSpPr>
+          <p:cNvPr id="1092" name="Rectangle 1091">
+            <a:extLst>
+              <a:ext uri="{FF2B5EF4-FFF2-40B4-BE49-F238E27FC236}">
+                <a16:creationId xmlns:a16="http://schemas.microsoft.com/office/drawing/2014/main" id="{B1265C47-634B-A7D4-08DA-A968ECF621CD}"/>
+              </a:ext>
+              <a:ext uri="{C183D7F6-B498-43B3-948B-1728B52AA6E4}">
+                <adec:decorative xmlns:adec="http://schemas.microsoft.com/office/drawing/2017/decorative" val="1"/>
+              </a:ext>
+            </a:extLst>
+          </p:cNvPr>
+          <p:cNvSpPr>
+            <a:spLocks noGrp="1" noRot="1" noChangeAspect="1" noMove="1" noResize="1" noEditPoints="1" noAdjustHandles="1" noChangeArrowheads="1" noChangeShapeType="1" noTextEdit="1"/>
+          </p:cNvSpPr>
+          <p:nvPr>
+            <p:extLst>
+              <p:ext uri="{386F3935-93C4-4BCD-93E2-E3B085C9AB24}">
+                <p16:designElem xmlns:p16="http://schemas.microsoft.com/office/powerpoint/2015/main" val="1"/>
+              </p:ext>
+            </p:extLst>
+          </p:nvPr>
+        </p:nvSpPr>
+        <p:spPr>
+          <a:xfrm rot="10800000" flipH="1">
+            <a:off x="1" y="3473354"/>
+            <a:ext cx="12192000" cy="3384643"/>
+          </a:xfrm>
+          <a:prstGeom prst="rect">
+            <a:avLst/>
+          </a:prstGeom>
+          <a:gradFill flip="none" rotWithShape="1">
+            <a:gsLst>
+              <a:gs pos="0">
+                <a:srgbClr val="000000">
+                  <a:alpha val="56000"/>
+                </a:srgbClr>
+              </a:gs>
+              <a:gs pos="100000">
+                <a:srgbClr val="000000">
+                  <a:alpha val="0"/>
+                </a:srgbClr>
+              </a:gs>
+              <a:gs pos="60000">
+                <a:srgbClr val="000000">
+                  <a:alpha val="28000"/>
+                </a:srgbClr>
+              </a:gs>
+            </a:gsLst>
+            <a:lin ang="5400000" scaled="0"/>
+            <a:tileRect/>
+          </a:gradFill>
+          <a:ln>
+            <a:noFill/>
+          </a:ln>
+        </p:spPr>
+        <p:style>
+          <a:lnRef idx="2">
+            <a:schemeClr val="accent1">
+              <a:shade val="50000"/>
+            </a:schemeClr>
+          </a:lnRef>
+          <a:fillRef idx="1">
+            <a:schemeClr val="accent1"/>
+          </a:fillRef>
+          <a:effectRef idx="0">
+            <a:schemeClr val="accent1"/>
+          </a:effectRef>
+          <a:fontRef idx="minor">
+            <a:schemeClr val="lt1"/>
+          </a:fontRef>
+        </p:style>
+        <p:txBody>
+          <a:bodyPr rtlCol="0" anchor="ctr"/>
+          <a:lstStyle/>
+          <a:p>
+            <a:pPr algn="ctr"/>
+            <a:endParaRPr lang="en-US">
+              <a:solidFill>
+                <a:srgbClr val="FFFFFF"/>
+              </a:solidFill>
+            </a:endParaRPr>
+          </a:p>
+        </p:txBody>
+      </p:sp>
+      <p:sp>
+        <p:nvSpPr>
+          <p:cNvPr id="1093" name="Rectangle 1092">
+            <a:extLst>
+              <a:ext uri="{FF2B5EF4-FFF2-40B4-BE49-F238E27FC236}">
+                <a16:creationId xmlns:a16="http://schemas.microsoft.com/office/drawing/2014/main" id="{3CD3C432-05FE-7D3E-5EB8-67F28604E952}"/>
+              </a:ext>
+              <a:ext uri="{C183D7F6-B498-43B3-948B-1728B52AA6E4}">
+                <adec:decorative xmlns:adec="http://schemas.microsoft.com/office/drawing/2017/decorative" val="1"/>
+              </a:ext>
+            </a:extLst>
+          </p:cNvPr>
+          <p:cNvSpPr>
+            <a:spLocks noGrp="1" noRot="1" noChangeAspect="1" noMove="1" noResize="1" noEditPoints="1" noAdjustHandles="1" noChangeArrowheads="1" noChangeShapeType="1" noTextEdit="1"/>
+          </p:cNvSpPr>
+          <p:nvPr>
+            <p:extLst>
+              <p:ext uri="{386F3935-93C4-4BCD-93E2-E3B085C9AB24}">
+                <p16:designElem xmlns:p16="http://schemas.microsoft.com/office/powerpoint/2015/main" val="1"/>
+              </p:ext>
+            </p:extLst>
+          </p:nvPr>
+        </p:nvSpPr>
+        <p:spPr>
+          <a:xfrm flipH="1">
+            <a:off x="-3" y="-1838"/>
+            <a:ext cx="12192001" cy="2687083"/>
+          </a:xfrm>
+          <a:prstGeom prst="rect">
+            <a:avLst/>
+          </a:prstGeom>
+          <a:gradFill flip="none" rotWithShape="1">
+            <a:gsLst>
+              <a:gs pos="0">
+                <a:srgbClr val="000000">
+                  <a:alpha val="38000"/>
+                </a:srgbClr>
+              </a:gs>
+              <a:gs pos="100000">
+                <a:srgbClr val="000000">
+                  <a:alpha val="0"/>
+                </a:srgbClr>
+              </a:gs>
+              <a:gs pos="56000">
+                <a:srgbClr val="000000">
+                  <a:alpha val="20000"/>
+                </a:srgbClr>
+              </a:gs>
+            </a:gsLst>
+            <a:lin ang="5400000" scaled="0"/>
+            <a:tileRect/>
+          </a:gradFill>
+          <a:ln>
+            <a:noFill/>
+          </a:ln>
+        </p:spPr>
+        <p:style>
+          <a:lnRef idx="2">
+            <a:schemeClr val="accent1">
+              <a:shade val="50000"/>
+            </a:schemeClr>
+          </a:lnRef>
+          <a:fillRef idx="1">
+            <a:schemeClr val="accent1"/>
+          </a:fillRef>
+          <a:effectRef idx="0">
+            <a:schemeClr val="accent1"/>
+          </a:effectRef>
+          <a:fontRef idx="minor">
+            <a:schemeClr val="lt1"/>
+          </a:fontRef>
+        </p:style>
+        <p:txBody>
+          <a:bodyPr rtlCol="0" anchor="ctr"/>
+          <a:lstStyle/>
+          <a:p>
+            <a:pPr algn="ctr"/>
+            <a:endParaRPr lang="en-US">
+              <a:solidFill>
+                <a:srgbClr val="FFFFFF"/>
+              </a:solidFill>
+            </a:endParaRPr>
+          </a:p>
+        </p:txBody>
+      </p:sp>
+      <p:cxnSp>
+        <p:nvCxnSpPr>
+          <p:cNvPr id="1087" name="Straight Connector 1086">
+            <a:extLst>
+              <a:ext uri="{FF2B5EF4-FFF2-40B4-BE49-F238E27FC236}">
+                <a16:creationId xmlns:a16="http://schemas.microsoft.com/office/drawing/2014/main" id="{D950B3B1-E09E-2E5C-DA01-D850800DF2B3}"/>
+              </a:ext>
+              <a:ext uri="{C183D7F6-B498-43B3-948B-1728B52AA6E4}">
+                <adec:decorative xmlns:adec="http://schemas.microsoft.com/office/drawing/2017/decorative" val="1"/>
+              </a:ext>
+            </a:extLst>
+          </p:cNvPr>
+          <p:cNvCxnSpPr>
+            <a:cxnSpLocks noGrp="1" noRot="1" noChangeAspect="1" noMove="1" noResize="1" noEditPoints="1" noAdjustHandles="1" noChangeArrowheads="1" noChangeShapeType="1"/>
+          </p:cNvCxnSpPr>
+          <p:nvPr>
+            <p:extLst>
+              <p:ext uri="{386F3935-93C4-4BCD-93E2-E3B085C9AB24}">
+                <p16:designElem xmlns:p16="http://schemas.microsoft.com/office/powerpoint/2015/main" val="1"/>
+              </p:ext>
+            </p:extLst>
+          </p:nvPr>
+        </p:nvCxnSpPr>
+        <p:spPr>
+          <a:xfrm>
+            <a:off x="935041" y="933221"/>
+            <a:ext cx="0" cy="3566765"/>
+          </a:xfrm>
+          <a:prstGeom prst="line">
+            <a:avLst/>
+          </a:prstGeom>
+          <a:ln w="38100">
+            <a:solidFill>
+              <a:schemeClr val="accent1">
+                <a:lumMod val="60000"/>
+                <a:lumOff val="40000"/>
+              </a:schemeClr>
+            </a:solidFill>
+          </a:ln>
+        </p:spPr>
+        <p:style>
+          <a:lnRef idx="1">
+            <a:schemeClr val="accent1"/>
+          </a:lnRef>
+          <a:fillRef idx="0">
+            <a:schemeClr val="accent1"/>
+          </a:fillRef>
+          <a:effectRef idx="0">
+            <a:schemeClr val="accent1"/>
+          </a:effectRef>
+          <a:fontRef idx="minor">
+            <a:schemeClr val="tx1"/>
+          </a:fontRef>
+        </p:style>
+      </p:cxnSp>
+      <p:sp>
+        <p:nvSpPr>
+          <p:cNvPr id="1089" name="Freeform: Shape 1088">
+            <a:extLst>
+              <a:ext uri="{FF2B5EF4-FFF2-40B4-BE49-F238E27FC236}">
+                <a16:creationId xmlns:a16="http://schemas.microsoft.com/office/drawing/2014/main" id="{1209CF69-6CF6-B01F-3539-6718EDFC6D9F}"/>
+              </a:ext>
+              <a:ext uri="{C183D7F6-B498-43B3-948B-1728B52AA6E4}">
+                <adec:decorative xmlns:adec="http://schemas.microsoft.com/office/drawing/2017/decorative" val="1"/>
+              </a:ext>
+            </a:extLst>
+          </p:cNvPr>
+          <p:cNvSpPr>
+            <a:spLocks noGrp="1" noRot="1" noChangeAspect="1" noMove="1" noResize="1" noEditPoints="1" noAdjustHandles="1" noChangeArrowheads="1" noChangeShapeType="1" noTextEdit="1"/>
+          </p:cNvSpPr>
+          <p:nvPr>
+            <p:extLst>
+              <p:ext uri="{386F3935-93C4-4BCD-93E2-E3B085C9AB24}">
+                <p16:designElem xmlns:p16="http://schemas.microsoft.com/office/powerpoint/2015/main" val="1"/>
+              </p:ext>
+            </p:extLst>
+          </p:nvPr>
+        </p:nvSpPr>
+        <p:spPr>
+          <a:xfrm rot="16200000" flipV="1">
+            <a:off x="5811987" y="-3962526"/>
+            <a:ext cx="547377" cy="10342555"/>
+          </a:xfrm>
+          <a:custGeom>
+            <a:avLst/>
+            <a:gdLst>
+              <a:gd name="connsiteX0" fmla="*/ 0 w 9985794"/>
+              <a:gd name="connsiteY0" fmla="*/ 0 h 4920343"/>
+              <a:gd name="connsiteX1" fmla="*/ 9985794 w 9985794"/>
+              <a:gd name="connsiteY1" fmla="*/ 0 h 4920343"/>
+              <a:gd name="connsiteX2" fmla="*/ 9985794 w 9985794"/>
+              <a:gd name="connsiteY2" fmla="*/ 4920343 h 4920343"/>
+              <a:gd name="connsiteX3" fmla="*/ 0 w 9985794"/>
+              <a:gd name="connsiteY3" fmla="*/ 4920343 h 4920343"/>
+              <a:gd name="connsiteX4" fmla="*/ 0 w 9985794"/>
+              <a:gd name="connsiteY4" fmla="*/ 4119525 h 4920343"/>
+              <a:gd name="connsiteX5" fmla="*/ 4905554 w 9985794"/>
+              <a:gd name="connsiteY5" fmla="*/ 4119525 h 4920343"/>
+              <a:gd name="connsiteX6" fmla="*/ 4905554 w 9985794"/>
+              <a:gd name="connsiteY6" fmla="*/ 1451087 h 4920343"/>
+              <a:gd name="connsiteX7" fmla="*/ 0 w 9985794"/>
+              <a:gd name="connsiteY7" fmla="*/ 1451087 h 4920343"/>
+              <a:gd name="connsiteX0" fmla="*/ 4905554 w 9985794"/>
+              <a:gd name="connsiteY0" fmla="*/ 4119525 h 4920343"/>
+              <a:gd name="connsiteX1" fmla="*/ 4905554 w 9985794"/>
+              <a:gd name="connsiteY1" fmla="*/ 1451087 h 4920343"/>
+              <a:gd name="connsiteX2" fmla="*/ 0 w 9985794"/>
+              <a:gd name="connsiteY2" fmla="*/ 1451087 h 4920343"/>
+              <a:gd name="connsiteX3" fmla="*/ 0 w 9985794"/>
+              <a:gd name="connsiteY3" fmla="*/ 0 h 4920343"/>
+              <a:gd name="connsiteX4" fmla="*/ 9985794 w 9985794"/>
+              <a:gd name="connsiteY4" fmla="*/ 0 h 4920343"/>
+              <a:gd name="connsiteX5" fmla="*/ 9985794 w 9985794"/>
+              <a:gd name="connsiteY5" fmla="*/ 4920343 h 4920343"/>
+              <a:gd name="connsiteX6" fmla="*/ 0 w 9985794"/>
+              <a:gd name="connsiteY6" fmla="*/ 4920343 h 4920343"/>
+              <a:gd name="connsiteX7" fmla="*/ 0 w 9985794"/>
+              <a:gd name="connsiteY7" fmla="*/ 4119525 h 4920343"/>
+              <a:gd name="connsiteX8" fmla="*/ 4996994 w 9985794"/>
+              <a:gd name="connsiteY8" fmla="*/ 4210965 h 4920343"/>
+              <a:gd name="connsiteX0" fmla="*/ 4905554 w 9985794"/>
+              <a:gd name="connsiteY0" fmla="*/ 4119525 h 4920343"/>
+              <a:gd name="connsiteX1" fmla="*/ 4905554 w 9985794"/>
+              <a:gd name="connsiteY1" fmla="*/ 1451087 h 4920343"/>
+              <a:gd name="connsiteX2" fmla="*/ 0 w 9985794"/>
+              <a:gd name="connsiteY2" fmla="*/ 1451087 h 4920343"/>
+              <a:gd name="connsiteX3" fmla="*/ 0 w 9985794"/>
+              <a:gd name="connsiteY3" fmla="*/ 0 h 4920343"/>
+              <a:gd name="connsiteX4" fmla="*/ 9985794 w 9985794"/>
+              <a:gd name="connsiteY4" fmla="*/ 0 h 4920343"/>
+              <a:gd name="connsiteX5" fmla="*/ 9985794 w 9985794"/>
+              <a:gd name="connsiteY5" fmla="*/ 4920343 h 4920343"/>
+              <a:gd name="connsiteX6" fmla="*/ 0 w 9985794"/>
+              <a:gd name="connsiteY6" fmla="*/ 4920343 h 4920343"/>
+              <a:gd name="connsiteX7" fmla="*/ 0 w 9985794"/>
+              <a:gd name="connsiteY7" fmla="*/ 4119525 h 4920343"/>
+              <a:gd name="connsiteX0" fmla="*/ 4905554 w 9985794"/>
+              <a:gd name="connsiteY0" fmla="*/ 1451087 h 4920343"/>
+              <a:gd name="connsiteX1" fmla="*/ 0 w 9985794"/>
+              <a:gd name="connsiteY1" fmla="*/ 1451087 h 4920343"/>
+              <a:gd name="connsiteX2" fmla="*/ 0 w 9985794"/>
+              <a:gd name="connsiteY2" fmla="*/ 0 h 4920343"/>
+              <a:gd name="connsiteX3" fmla="*/ 9985794 w 9985794"/>
+              <a:gd name="connsiteY3" fmla="*/ 0 h 4920343"/>
+              <a:gd name="connsiteX4" fmla="*/ 9985794 w 9985794"/>
+              <a:gd name="connsiteY4" fmla="*/ 4920343 h 4920343"/>
+              <a:gd name="connsiteX5" fmla="*/ 0 w 9985794"/>
+              <a:gd name="connsiteY5" fmla="*/ 4920343 h 4920343"/>
+              <a:gd name="connsiteX6" fmla="*/ 0 w 9985794"/>
+              <a:gd name="connsiteY6" fmla="*/ 4119525 h 4920343"/>
+              <a:gd name="connsiteX0" fmla="*/ 0 w 9985794"/>
+              <a:gd name="connsiteY0" fmla="*/ 1451087 h 4920343"/>
+              <a:gd name="connsiteX1" fmla="*/ 0 w 9985794"/>
+              <a:gd name="connsiteY1" fmla="*/ 0 h 4920343"/>
+              <a:gd name="connsiteX2" fmla="*/ 9985794 w 9985794"/>
+              <a:gd name="connsiteY2" fmla="*/ 0 h 4920343"/>
+              <a:gd name="connsiteX3" fmla="*/ 9985794 w 9985794"/>
+              <a:gd name="connsiteY3" fmla="*/ 4920343 h 4920343"/>
+              <a:gd name="connsiteX4" fmla="*/ 0 w 9985794"/>
+              <a:gd name="connsiteY4" fmla="*/ 4920343 h 4920343"/>
+              <a:gd name="connsiteX5" fmla="*/ 0 w 9985794"/>
+              <a:gd name="connsiteY5" fmla="*/ 4119525 h 4920343"/>
+              <a:gd name="connsiteX0" fmla="*/ 0 w 9987788"/>
+              <a:gd name="connsiteY0" fmla="*/ 2249229 h 4920343"/>
+              <a:gd name="connsiteX1" fmla="*/ 1994 w 9987788"/>
+              <a:gd name="connsiteY1" fmla="*/ 0 h 4920343"/>
+              <a:gd name="connsiteX2" fmla="*/ 9987788 w 9987788"/>
+              <a:gd name="connsiteY2" fmla="*/ 0 h 4920343"/>
+              <a:gd name="connsiteX3" fmla="*/ 9987788 w 9987788"/>
+              <a:gd name="connsiteY3" fmla="*/ 4920343 h 4920343"/>
+              <a:gd name="connsiteX4" fmla="*/ 1994 w 9987788"/>
+              <a:gd name="connsiteY4" fmla="*/ 4920343 h 4920343"/>
+              <a:gd name="connsiteX5" fmla="*/ 1994 w 9987788"/>
+              <a:gd name="connsiteY5" fmla="*/ 4119525 h 4920343"/>
+              <a:gd name="connsiteX0" fmla="*/ 10003 w 9985823"/>
+              <a:gd name="connsiteY0" fmla="*/ 2385996 h 4920343"/>
+              <a:gd name="connsiteX1" fmla="*/ 29 w 9985823"/>
+              <a:gd name="connsiteY1" fmla="*/ 0 h 4920343"/>
+              <a:gd name="connsiteX2" fmla="*/ 9985823 w 9985823"/>
+              <a:gd name="connsiteY2" fmla="*/ 0 h 4920343"/>
+              <a:gd name="connsiteX3" fmla="*/ 9985823 w 9985823"/>
+              <a:gd name="connsiteY3" fmla="*/ 4920343 h 4920343"/>
+              <a:gd name="connsiteX4" fmla="*/ 29 w 9985823"/>
+              <a:gd name="connsiteY4" fmla="*/ 4920343 h 4920343"/>
+              <a:gd name="connsiteX5" fmla="*/ 29 w 9985823"/>
+              <a:gd name="connsiteY5" fmla="*/ 4119525 h 4920343"/>
+              <a:gd name="connsiteX0" fmla="*/ 192 w 9985985"/>
+              <a:gd name="connsiteY0" fmla="*/ 2390079 h 4920343"/>
+              <a:gd name="connsiteX1" fmla="*/ 191 w 9985985"/>
+              <a:gd name="connsiteY1" fmla="*/ 0 h 4920343"/>
+              <a:gd name="connsiteX2" fmla="*/ 9985985 w 9985985"/>
+              <a:gd name="connsiteY2" fmla="*/ 0 h 4920343"/>
+              <a:gd name="connsiteX3" fmla="*/ 9985985 w 9985985"/>
+              <a:gd name="connsiteY3" fmla="*/ 4920343 h 4920343"/>
+              <a:gd name="connsiteX4" fmla="*/ 191 w 9985985"/>
+              <a:gd name="connsiteY4" fmla="*/ 4920343 h 4920343"/>
+              <a:gd name="connsiteX5" fmla="*/ 191 w 9985985"/>
+              <a:gd name="connsiteY5" fmla="*/ 4119525 h 4920343"/>
+              <a:gd name="connsiteX0" fmla="*/ 192 w 9985985"/>
+              <a:gd name="connsiteY0" fmla="*/ 2390079 h 4920343"/>
+              <a:gd name="connsiteX1" fmla="*/ 191 w 9985985"/>
+              <a:gd name="connsiteY1" fmla="*/ 0 h 4920343"/>
+              <a:gd name="connsiteX2" fmla="*/ 9985985 w 9985985"/>
+              <a:gd name="connsiteY2" fmla="*/ 0 h 4920343"/>
+              <a:gd name="connsiteX3" fmla="*/ 9985985 w 9985985"/>
+              <a:gd name="connsiteY3" fmla="*/ 4920343 h 4920343"/>
+              <a:gd name="connsiteX4" fmla="*/ 191 w 9985985"/>
+              <a:gd name="connsiteY4" fmla="*/ 4920343 h 4920343"/>
+              <a:gd name="connsiteX0" fmla="*/ 192 w 9985985"/>
+              <a:gd name="connsiteY0" fmla="*/ 2390079 h 4920343"/>
+              <a:gd name="connsiteX1" fmla="*/ 191 w 9985985"/>
+              <a:gd name="connsiteY1" fmla="*/ 0 h 4920343"/>
+              <a:gd name="connsiteX2" fmla="*/ 9985985 w 9985985"/>
+              <a:gd name="connsiteY2" fmla="*/ 0 h 4920343"/>
+              <a:gd name="connsiteX3" fmla="*/ 9985985 w 9985985"/>
+              <a:gd name="connsiteY3" fmla="*/ 4920343 h 4920343"/>
+              <a:gd name="connsiteX0" fmla="*/ -1 w 9985793"/>
+              <a:gd name="connsiteY0" fmla="*/ 0 h 4920343"/>
+              <a:gd name="connsiteX1" fmla="*/ 9985793 w 9985793"/>
+              <a:gd name="connsiteY1" fmla="*/ 0 h 4920343"/>
+              <a:gd name="connsiteX2" fmla="*/ 9985793 w 9985793"/>
+              <a:gd name="connsiteY2" fmla="*/ 4920343 h 4920343"/>
+              <a:gd name="connsiteX0" fmla="*/ 0 w 2295500"/>
+              <a:gd name="connsiteY0" fmla="*/ 0 h 4925526"/>
+              <a:gd name="connsiteX1" fmla="*/ 2295500 w 2295500"/>
+              <a:gd name="connsiteY1" fmla="*/ 5183 h 4925526"/>
+              <a:gd name="connsiteX2" fmla="*/ 2295500 w 2295500"/>
+              <a:gd name="connsiteY2" fmla="*/ 4925526 h 4925526"/>
+              <a:gd name="connsiteX0" fmla="*/ 0 w 866754"/>
+              <a:gd name="connsiteY0" fmla="*/ 2592 h 4920343"/>
+              <a:gd name="connsiteX1" fmla="*/ 866754 w 866754"/>
+              <a:gd name="connsiteY1" fmla="*/ 0 h 4920343"/>
+              <a:gd name="connsiteX2" fmla="*/ 866754 w 866754"/>
+              <a:gd name="connsiteY2" fmla="*/ 4920343 h 4920343"/>
+            </a:gdLst>
+            <a:ahLst/>
+            <a:cxnLst>
+              <a:cxn ang="0">
+                <a:pos x="connsiteX0" y="connsiteY0"/>
+              </a:cxn>
+              <a:cxn ang="0">
+                <a:pos x="connsiteX1" y="connsiteY1"/>
+              </a:cxn>
+              <a:cxn ang="0">
+                <a:pos x="connsiteX2" y="connsiteY2"/>
+              </a:cxn>
+            </a:cxnLst>
+            <a:rect l="l" t="t" r="r" b="b"/>
+            <a:pathLst>
+              <a:path w="866754" h="4920343">
+                <a:moveTo>
+                  <a:pt x="0" y="2592"/>
+                </a:moveTo>
+                <a:lnTo>
+                  <a:pt x="866754" y="0"/>
+                </a:lnTo>
+                <a:lnTo>
+                  <a:pt x="866754" y="4920343"/>
+                </a:lnTo>
+              </a:path>
+            </a:pathLst>
+          </a:custGeom>
+          <a:noFill/>
+          <a:ln w="38100">
+            <a:solidFill>
+              <a:schemeClr val="accent1">
+                <a:lumMod val="60000"/>
+                <a:lumOff val="40000"/>
+              </a:schemeClr>
+            </a:solidFill>
+          </a:ln>
+        </p:spPr>
+        <p:style>
+          <a:lnRef idx="2">
+            <a:schemeClr val="accent1">
+              <a:shade val="50000"/>
+            </a:schemeClr>
+          </a:lnRef>
+          <a:fillRef idx="1">
+            <a:schemeClr val="accent1"/>
+          </a:fillRef>
+          <a:effectRef idx="0">
+            <a:schemeClr val="accent1"/>
+          </a:effectRef>
+          <a:fontRef idx="minor">
+            <a:schemeClr val="lt1"/>
+          </a:fontRef>
+        </p:style>
+        <p:txBody>
+          <a:bodyPr wrap="square" rtlCol="0" anchor="ctr">
+            <a:noAutofit/>
+          </a:bodyPr>
+          <a:lstStyle/>
+          <a:p>
+            <a:pPr algn="ctr"/>
+            <a:endParaRPr lang="en-US"/>
+          </a:p>
+        </p:txBody>
+      </p:sp>
+      <p:sp>
+        <p:nvSpPr>
+          <p:cNvPr id="1091" name="Freeform: Shape 1090">
+            <a:extLst>
+              <a:ext uri="{FF2B5EF4-FFF2-40B4-BE49-F238E27FC236}">
+                <a16:creationId xmlns:a16="http://schemas.microsoft.com/office/drawing/2014/main" id="{503A1D62-23C1-901B-42CA-7DD6F7C0B14A}"/>
+              </a:ext>
+              <a:ext uri="{C183D7F6-B498-43B3-948B-1728B52AA6E4}">
+                <adec:decorative xmlns:adec="http://schemas.microsoft.com/office/drawing/2017/decorative" val="1"/>
+              </a:ext>
+            </a:extLst>
+          </p:cNvPr>
+          <p:cNvSpPr>
+            <a:spLocks noGrp="1" noRot="1" noChangeAspect="1" noMove="1" noResize="1" noEditPoints="1" noAdjustHandles="1" noChangeArrowheads="1" noChangeShapeType="1" noTextEdit="1"/>
+          </p:cNvSpPr>
+          <p:nvPr>
+            <p:extLst>
+              <p:ext uri="{386F3935-93C4-4BCD-93E2-E3B085C9AB24}">
+                <p16:designElem xmlns:p16="http://schemas.microsoft.com/office/powerpoint/2015/main" val="1"/>
+              </p:ext>
+            </p:extLst>
+          </p:nvPr>
+        </p:nvSpPr>
+        <p:spPr>
+          <a:xfrm rot="5400000">
+            <a:off x="6606266" y="1269571"/>
+            <a:ext cx="3468315" cy="5838422"/>
+          </a:xfrm>
+          <a:custGeom>
+            <a:avLst/>
+            <a:gdLst>
+              <a:gd name="connsiteX0" fmla="*/ 0 w 9985794"/>
+              <a:gd name="connsiteY0" fmla="*/ 0 h 4920343"/>
+              <a:gd name="connsiteX1" fmla="*/ 9985794 w 9985794"/>
+              <a:gd name="connsiteY1" fmla="*/ 0 h 4920343"/>
+              <a:gd name="connsiteX2" fmla="*/ 9985794 w 9985794"/>
+              <a:gd name="connsiteY2" fmla="*/ 4920343 h 4920343"/>
+              <a:gd name="connsiteX3" fmla="*/ 0 w 9985794"/>
+              <a:gd name="connsiteY3" fmla="*/ 4920343 h 4920343"/>
+              <a:gd name="connsiteX4" fmla="*/ 0 w 9985794"/>
+              <a:gd name="connsiteY4" fmla="*/ 4119525 h 4920343"/>
+              <a:gd name="connsiteX5" fmla="*/ 4905554 w 9985794"/>
+              <a:gd name="connsiteY5" fmla="*/ 4119525 h 4920343"/>
+              <a:gd name="connsiteX6" fmla="*/ 4905554 w 9985794"/>
+              <a:gd name="connsiteY6" fmla="*/ 1451087 h 4920343"/>
+              <a:gd name="connsiteX7" fmla="*/ 0 w 9985794"/>
+              <a:gd name="connsiteY7" fmla="*/ 1451087 h 4920343"/>
+              <a:gd name="connsiteX0" fmla="*/ 4905554 w 9985794"/>
+              <a:gd name="connsiteY0" fmla="*/ 4119525 h 4920343"/>
+              <a:gd name="connsiteX1" fmla="*/ 4905554 w 9985794"/>
+              <a:gd name="connsiteY1" fmla="*/ 1451087 h 4920343"/>
+              <a:gd name="connsiteX2" fmla="*/ 0 w 9985794"/>
+              <a:gd name="connsiteY2" fmla="*/ 1451087 h 4920343"/>
+              <a:gd name="connsiteX3" fmla="*/ 0 w 9985794"/>
+              <a:gd name="connsiteY3" fmla="*/ 0 h 4920343"/>
+              <a:gd name="connsiteX4" fmla="*/ 9985794 w 9985794"/>
+              <a:gd name="connsiteY4" fmla="*/ 0 h 4920343"/>
+              <a:gd name="connsiteX5" fmla="*/ 9985794 w 9985794"/>
+              <a:gd name="connsiteY5" fmla="*/ 4920343 h 4920343"/>
+              <a:gd name="connsiteX6" fmla="*/ 0 w 9985794"/>
+              <a:gd name="connsiteY6" fmla="*/ 4920343 h 4920343"/>
+              <a:gd name="connsiteX7" fmla="*/ 0 w 9985794"/>
+              <a:gd name="connsiteY7" fmla="*/ 4119525 h 4920343"/>
+              <a:gd name="connsiteX8" fmla="*/ 4996994 w 9985794"/>
+              <a:gd name="connsiteY8" fmla="*/ 4210965 h 4920343"/>
+              <a:gd name="connsiteX0" fmla="*/ 4905554 w 9985794"/>
+              <a:gd name="connsiteY0" fmla="*/ 4119525 h 4920343"/>
+              <a:gd name="connsiteX1" fmla="*/ 4905554 w 9985794"/>
+              <a:gd name="connsiteY1" fmla="*/ 1451087 h 4920343"/>
+              <a:gd name="connsiteX2" fmla="*/ 0 w 9985794"/>
+              <a:gd name="connsiteY2" fmla="*/ 1451087 h 4920343"/>
+              <a:gd name="connsiteX3" fmla="*/ 0 w 9985794"/>
+              <a:gd name="connsiteY3" fmla="*/ 0 h 4920343"/>
+              <a:gd name="connsiteX4" fmla="*/ 9985794 w 9985794"/>
+              <a:gd name="connsiteY4" fmla="*/ 0 h 4920343"/>
+              <a:gd name="connsiteX5" fmla="*/ 9985794 w 9985794"/>
+              <a:gd name="connsiteY5" fmla="*/ 4920343 h 4920343"/>
+              <a:gd name="connsiteX6" fmla="*/ 0 w 9985794"/>
+              <a:gd name="connsiteY6" fmla="*/ 4920343 h 4920343"/>
+              <a:gd name="connsiteX7" fmla="*/ 0 w 9985794"/>
+              <a:gd name="connsiteY7" fmla="*/ 4119525 h 4920343"/>
+              <a:gd name="connsiteX0" fmla="*/ 4905554 w 9985794"/>
+              <a:gd name="connsiteY0" fmla="*/ 1451087 h 4920343"/>
+              <a:gd name="connsiteX1" fmla="*/ 0 w 9985794"/>
+              <a:gd name="connsiteY1" fmla="*/ 1451087 h 4920343"/>
+              <a:gd name="connsiteX2" fmla="*/ 0 w 9985794"/>
+              <a:gd name="connsiteY2" fmla="*/ 0 h 4920343"/>
+              <a:gd name="connsiteX3" fmla="*/ 9985794 w 9985794"/>
+              <a:gd name="connsiteY3" fmla="*/ 0 h 4920343"/>
+              <a:gd name="connsiteX4" fmla="*/ 9985794 w 9985794"/>
+              <a:gd name="connsiteY4" fmla="*/ 4920343 h 4920343"/>
+              <a:gd name="connsiteX5" fmla="*/ 0 w 9985794"/>
+              <a:gd name="connsiteY5" fmla="*/ 4920343 h 4920343"/>
+              <a:gd name="connsiteX6" fmla="*/ 0 w 9985794"/>
+              <a:gd name="connsiteY6" fmla="*/ 4119525 h 4920343"/>
+              <a:gd name="connsiteX0" fmla="*/ 0 w 9985794"/>
+              <a:gd name="connsiteY0" fmla="*/ 1451087 h 4920343"/>
+              <a:gd name="connsiteX1" fmla="*/ 0 w 9985794"/>
+              <a:gd name="connsiteY1" fmla="*/ 0 h 4920343"/>
+              <a:gd name="connsiteX2" fmla="*/ 9985794 w 9985794"/>
+              <a:gd name="connsiteY2" fmla="*/ 0 h 4920343"/>
+              <a:gd name="connsiteX3" fmla="*/ 9985794 w 9985794"/>
+              <a:gd name="connsiteY3" fmla="*/ 4920343 h 4920343"/>
+              <a:gd name="connsiteX4" fmla="*/ 0 w 9985794"/>
+              <a:gd name="connsiteY4" fmla="*/ 4920343 h 4920343"/>
+              <a:gd name="connsiteX5" fmla="*/ 0 w 9985794"/>
+              <a:gd name="connsiteY5" fmla="*/ 4119525 h 4920343"/>
+              <a:gd name="connsiteX0" fmla="*/ 0 w 9987788"/>
+              <a:gd name="connsiteY0" fmla="*/ 2249229 h 4920343"/>
+              <a:gd name="connsiteX1" fmla="*/ 1994 w 9987788"/>
+              <a:gd name="connsiteY1" fmla="*/ 0 h 4920343"/>
+              <a:gd name="connsiteX2" fmla="*/ 9987788 w 9987788"/>
+              <a:gd name="connsiteY2" fmla="*/ 0 h 4920343"/>
+              <a:gd name="connsiteX3" fmla="*/ 9987788 w 9987788"/>
+              <a:gd name="connsiteY3" fmla="*/ 4920343 h 4920343"/>
+              <a:gd name="connsiteX4" fmla="*/ 1994 w 9987788"/>
+              <a:gd name="connsiteY4" fmla="*/ 4920343 h 4920343"/>
+              <a:gd name="connsiteX5" fmla="*/ 1994 w 9987788"/>
+              <a:gd name="connsiteY5" fmla="*/ 4119525 h 4920343"/>
+              <a:gd name="connsiteX0" fmla="*/ 10003 w 9985823"/>
+              <a:gd name="connsiteY0" fmla="*/ 2385996 h 4920343"/>
+              <a:gd name="connsiteX1" fmla="*/ 29 w 9985823"/>
+              <a:gd name="connsiteY1" fmla="*/ 0 h 4920343"/>
+              <a:gd name="connsiteX2" fmla="*/ 9985823 w 9985823"/>
+              <a:gd name="connsiteY2" fmla="*/ 0 h 4920343"/>
+              <a:gd name="connsiteX3" fmla="*/ 9985823 w 9985823"/>
+              <a:gd name="connsiteY3" fmla="*/ 4920343 h 4920343"/>
+              <a:gd name="connsiteX4" fmla="*/ 29 w 9985823"/>
+              <a:gd name="connsiteY4" fmla="*/ 4920343 h 4920343"/>
+              <a:gd name="connsiteX5" fmla="*/ 29 w 9985823"/>
+              <a:gd name="connsiteY5" fmla="*/ 4119525 h 4920343"/>
+              <a:gd name="connsiteX0" fmla="*/ 192 w 9985985"/>
+              <a:gd name="connsiteY0" fmla="*/ 2390079 h 4920343"/>
+              <a:gd name="connsiteX1" fmla="*/ 191 w 9985985"/>
+              <a:gd name="connsiteY1" fmla="*/ 0 h 4920343"/>
+              <a:gd name="connsiteX2" fmla="*/ 9985985 w 9985985"/>
+              <a:gd name="connsiteY2" fmla="*/ 0 h 4920343"/>
+              <a:gd name="connsiteX3" fmla="*/ 9985985 w 9985985"/>
+              <a:gd name="connsiteY3" fmla="*/ 4920343 h 4920343"/>
+              <a:gd name="connsiteX4" fmla="*/ 191 w 9985985"/>
+              <a:gd name="connsiteY4" fmla="*/ 4920343 h 4920343"/>
+              <a:gd name="connsiteX5" fmla="*/ 191 w 9985985"/>
+              <a:gd name="connsiteY5" fmla="*/ 4119525 h 4920343"/>
+              <a:gd name="connsiteX0" fmla="*/ 192 w 9985985"/>
+              <a:gd name="connsiteY0" fmla="*/ 2390079 h 4920343"/>
+              <a:gd name="connsiteX1" fmla="*/ 191 w 9985985"/>
+              <a:gd name="connsiteY1" fmla="*/ 0 h 4920343"/>
+              <a:gd name="connsiteX2" fmla="*/ 9985985 w 9985985"/>
+              <a:gd name="connsiteY2" fmla="*/ 0 h 4920343"/>
+              <a:gd name="connsiteX3" fmla="*/ 9985985 w 9985985"/>
+              <a:gd name="connsiteY3" fmla="*/ 4920343 h 4920343"/>
+              <a:gd name="connsiteX4" fmla="*/ 191 w 9985985"/>
+              <a:gd name="connsiteY4" fmla="*/ 4920343 h 4920343"/>
+              <a:gd name="connsiteX0" fmla="*/ 192 w 9985985"/>
+              <a:gd name="connsiteY0" fmla="*/ 2390079 h 4920343"/>
+              <a:gd name="connsiteX1" fmla="*/ 191 w 9985985"/>
+              <a:gd name="connsiteY1" fmla="*/ 0 h 4920343"/>
+              <a:gd name="connsiteX2" fmla="*/ 9985985 w 9985985"/>
+              <a:gd name="connsiteY2" fmla="*/ 0 h 4920343"/>
+              <a:gd name="connsiteX3" fmla="*/ 9985985 w 9985985"/>
+              <a:gd name="connsiteY3" fmla="*/ 4920343 h 4920343"/>
+              <a:gd name="connsiteX0" fmla="*/ -1 w 9985793"/>
+              <a:gd name="connsiteY0" fmla="*/ 0 h 4920343"/>
+              <a:gd name="connsiteX1" fmla="*/ 9985793 w 9985793"/>
+              <a:gd name="connsiteY1" fmla="*/ 0 h 4920343"/>
+              <a:gd name="connsiteX2" fmla="*/ 9985793 w 9985793"/>
+              <a:gd name="connsiteY2" fmla="*/ 4920343 h 4920343"/>
+              <a:gd name="connsiteX0" fmla="*/ 0 w 2295500"/>
+              <a:gd name="connsiteY0" fmla="*/ 0 h 4925526"/>
+              <a:gd name="connsiteX1" fmla="*/ 2295500 w 2295500"/>
+              <a:gd name="connsiteY1" fmla="*/ 5183 h 4925526"/>
+              <a:gd name="connsiteX2" fmla="*/ 2295500 w 2295500"/>
+              <a:gd name="connsiteY2" fmla="*/ 4925526 h 4925526"/>
+              <a:gd name="connsiteX0" fmla="*/ 0 w 866754"/>
+              <a:gd name="connsiteY0" fmla="*/ 2592 h 4920343"/>
+              <a:gd name="connsiteX1" fmla="*/ 866754 w 866754"/>
+              <a:gd name="connsiteY1" fmla="*/ 0 h 4920343"/>
+              <a:gd name="connsiteX2" fmla="*/ 866754 w 866754"/>
+              <a:gd name="connsiteY2" fmla="*/ 4920343 h 4920343"/>
+              <a:gd name="connsiteX0" fmla="*/ 0 w 3176280"/>
+              <a:gd name="connsiteY0" fmla="*/ 0 h 4927294"/>
+              <a:gd name="connsiteX1" fmla="*/ 3176280 w 3176280"/>
+              <a:gd name="connsiteY1" fmla="*/ 6951 h 4927294"/>
+              <a:gd name="connsiteX2" fmla="*/ 3176280 w 3176280"/>
+              <a:gd name="connsiteY2" fmla="*/ 4927294 h 4927294"/>
+              <a:gd name="connsiteX0" fmla="*/ -1 w 5403573"/>
+              <a:gd name="connsiteY0" fmla="*/ 0 h 4921569"/>
+              <a:gd name="connsiteX1" fmla="*/ 5403573 w 5403573"/>
+              <a:gd name="connsiteY1" fmla="*/ 1226 h 4921569"/>
+              <a:gd name="connsiteX2" fmla="*/ 5403573 w 5403573"/>
+              <a:gd name="connsiteY2" fmla="*/ 4921569 h 4921569"/>
+              <a:gd name="connsiteX0" fmla="*/ 0 w 5464351"/>
+              <a:gd name="connsiteY0" fmla="*/ 0 h 4923478"/>
+              <a:gd name="connsiteX1" fmla="*/ 5464351 w 5464351"/>
+              <a:gd name="connsiteY1" fmla="*/ 3135 h 4923478"/>
+              <a:gd name="connsiteX2" fmla="*/ 5464351 w 5464351"/>
+              <a:gd name="connsiteY2" fmla="*/ 4923478 h 4923478"/>
+            </a:gdLst>
+            <a:ahLst/>
+            <a:cxnLst>
+              <a:cxn ang="0">
+                <a:pos x="connsiteX0" y="connsiteY0"/>
+              </a:cxn>
+              <a:cxn ang="0">
+                <a:pos x="connsiteX1" y="connsiteY1"/>
+              </a:cxn>
+              <a:cxn ang="0">
+                <a:pos x="connsiteX2" y="connsiteY2"/>
+              </a:cxn>
+            </a:cxnLst>
+            <a:rect l="l" t="t" r="r" b="b"/>
+            <a:pathLst>
+              <a:path w="5464351" h="4923478">
+                <a:moveTo>
+                  <a:pt x="0" y="0"/>
+                </a:moveTo>
+                <a:lnTo>
+                  <a:pt x="5464351" y="3135"/>
+                </a:lnTo>
+                <a:lnTo>
+                  <a:pt x="5464351" y="4923478"/>
+                </a:lnTo>
+              </a:path>
+            </a:pathLst>
+          </a:custGeom>
+          <a:noFill/>
+          <a:ln w="38100">
+            <a:solidFill>
+              <a:schemeClr val="accent1">
+                <a:lumMod val="60000"/>
+                <a:lumOff val="40000"/>
+              </a:schemeClr>
+            </a:solidFill>
+          </a:ln>
+        </p:spPr>
+        <p:style>
+          <a:lnRef idx="2">
+            <a:schemeClr val="accent1">
+              <a:shade val="50000"/>
+            </a:schemeClr>
+          </a:lnRef>
+          <a:fillRef idx="1">
+            <a:schemeClr val="accent1"/>
+          </a:fillRef>
+          <a:effectRef idx="0">
+            <a:schemeClr val="accent1"/>
+          </a:effectRef>
+          <a:fontRef idx="minor">
+            <a:schemeClr val="lt1"/>
+          </a:fontRef>
+        </p:style>
+        <p:txBody>
+          <a:bodyPr wrap="square" rtlCol="0" anchor="ctr">
+            <a:noAutofit/>
+          </a:bodyPr>
+          <a:lstStyle/>
+          <a:p>
+            <a:pPr algn="ctr"/>
+            <a:endParaRPr lang="en-US"/>
+          </a:p>
+        </p:txBody>
+      </p:sp>
+      <p:sp>
+        <p:nvSpPr>
+          <p:cNvPr id="2" name="Title 1">
+            <a:extLst>
+              <a:ext uri="{FF2B5EF4-FFF2-40B4-BE49-F238E27FC236}">
+                <a16:creationId xmlns:a16="http://schemas.microsoft.com/office/drawing/2014/main" id="{31D5C07D-9BFA-8B95-7646-F43F9C95EE15}"/>
+              </a:ext>
+            </a:extLst>
+          </p:cNvPr>
+          <p:cNvSpPr>
+            <a:spLocks noGrp="1"/>
+          </p:cNvSpPr>
+          <p:nvPr>
+            <p:ph type="title"/>
+          </p:nvPr>
+        </p:nvSpPr>
+        <p:spPr>
+          <a:xfrm>
+            <a:off x="798490" y="4507606"/>
+            <a:ext cx="4622718" cy="1642056"/>
+          </a:xfrm>
+          <a:noFill/>
+        </p:spPr>
+        <p:txBody>
+          <a:bodyPr vert="horz" lIns="91440" tIns="45720" rIns="91440" bIns="45720" rtlCol="0" anchor="b">
+            <a:normAutofit/>
+          </a:bodyPr>
+          <a:lstStyle/>
+          <a:p>
+            <a:pPr>
+              <a:lnSpc>
+                <a:spcPct val="110000"/>
+              </a:lnSpc>
+            </a:pPr>
+            <a:r>
+              <a:rPr lang="en-US" sz="2200" spc="530" dirty="0">
+                <a:solidFill>
+                  <a:schemeClr val="bg1"/>
+                </a:solidFill>
+              </a:rPr>
+              <a:t>It works on my machine</a:t>
+            </a:r>
+            <a:br>
+              <a:rPr lang="en-US" sz="2200" spc="530" dirty="0">
+                <a:solidFill>
+                  <a:schemeClr val="bg1"/>
+                </a:solidFill>
+              </a:rPr>
+            </a:br>
+            <a:r>
+              <a:rPr lang="en-US" sz="2200" spc="530" dirty="0">
+                <a:solidFill>
+                  <a:schemeClr val="bg1"/>
+                </a:solidFill>
+              </a:rPr>
+              <a:t> → </a:t>
+            </a:r>
+            <a:br>
+              <a:rPr lang="en-US" sz="2200" spc="530" dirty="0">
+                <a:solidFill>
+                  <a:schemeClr val="bg1"/>
+                </a:solidFill>
+              </a:rPr>
+            </a:br>
+            <a:r>
+              <a:rPr lang="en-US" sz="2200" spc="530" dirty="0">
+                <a:solidFill>
+                  <a:schemeClr val="bg1"/>
+                </a:solidFill>
+              </a:rPr>
+              <a:t>It works on everyone's machine</a:t>
+            </a:r>
+          </a:p>
+        </p:txBody>
+      </p:sp>
+    </p:spTree>
+    <p:extLst>
+      <p:ext uri="{BB962C8B-B14F-4D97-AF65-F5344CB8AC3E}">
+        <p14:creationId xmlns:p14="http://schemas.microsoft.com/office/powerpoint/2010/main" val="3611018014"/>
+      </p:ext>
+    </p:extLst>
+  </p:cSld>
+  <p:clrMapOvr>
+    <a:masterClrMapping/>
+  </p:clrMapOvr>
+  <p:timing>
+    <p:tnLst>
+      <p:par>
+        <p:cTn id="1" dur="indefinite" restart="never" nodeType="tmRoot">
+          <p:childTnLst>
+            <p:seq concurrent="1" nextAc="seek">
+              <p:cTn id="2" dur="indefinite" nodeType="mainSeq">
+                <p:childTnLst>
+                  <p:par>
+                    <p:cTn id="3" fill="hold">
+                      <p:stCondLst>
+                        <p:cond delay="indefinite"/>
+                        <p:cond evt="onBegin" delay="0">
+                          <p:tn val="2"/>
+                        </p:cond>
+                      </p:stCondLst>
+                      <p:childTnLst>
+                        <p:par>
+                          <p:cTn id="4" fill="hold">
+                            <p:stCondLst>
+                              <p:cond delay="0"/>
+                            </p:stCondLst>
+                            <p:childTnLst>
+                              <p:par>
+                                <p:cTn id="5" presetID="10" presetClass="entr" presetSubtype="0" fill="hold" grpId="0" nodeType="withEffect">
+                                  <p:stCondLst>
+                                    <p:cond delay="1000"/>
+                                  </p:stCondLst>
+                                  <p:iterate type="lt">
+                                    <p:tmPct val="10000"/>
+                                  </p:iterate>
+                                  <p:childTnLst>
+                                    <p:set>
+                                      <p:cBhvr>
+                                        <p:cTn id="6" dur="1" fill="hold">
+                                          <p:stCondLst>
+                                            <p:cond delay="0"/>
+                                          </p:stCondLst>
+                                        </p:cTn>
+                                        <p:tgtEl>
+                                          <p:spTgt spid="2"/>
+                                        </p:tgtEl>
+                                        <p:attrNameLst>
+                                          <p:attrName>style.visibility</p:attrName>
+                                        </p:attrNameLst>
+                                      </p:cBhvr>
+                                      <p:to>
+                                        <p:strVal val="visible"/>
+                                      </p:to>
+                                    </p:set>
+                                    <p:animEffect transition="in" filter="fade">
+                                      <p:cBhvr>
+                                        <p:cTn id="7" dur="400"/>
+                                        <p:tgtEl>
+                                          <p:spTgt spid="2"/>
+                                        </p:tgtEl>
+                                      </p:cBhvr>
+                                    </p:animEffect>
+                                  </p:childTnLst>
+                                </p:cTn>
+                              </p:par>
+                            </p:childTnLst>
+                          </p:cTn>
+                        </p:par>
+                      </p:childTnLst>
+                    </p:cTn>
+                  </p:par>
+                </p:childTnLst>
+              </p:cTn>
+              <p:prevCondLst>
+                <p:cond evt="onPrev" delay="0">
+                  <p:tgtEl>
+                    <p:sldTgt/>
+                  </p:tgtEl>
+                </p:cond>
+              </p:prevCondLst>
+              <p:nextCondLst>
+                <p:cond evt="onNext" delay="0">
+                  <p:tgtEl>
+                    <p:sldTgt/>
+                  </p:tgtEl>
+                </p:cond>
+              </p:nextCondLst>
+            </p:seq>
+          </p:childTnLst>
+        </p:cTn>
+      </p:par>
+    </p:tnLst>
+    <p:bldLst>
+      <p:bldP spid="2" grpId="0"/>
+    </p:bldLst>
+  </p:timing>
+</p:sld>
+</file>
+
+<file path=ppt/slides/slide14.xml><?xml version="1.0" encoding="utf-8"?>
+<p:sld xmlns:a="http://schemas.openxmlformats.org/drawingml/2006/main" xmlns:r="http://schemas.openxmlformats.org/officeDocument/2006/relationships" xmlns:p="http://schemas.openxmlformats.org/presentationml/2006/main">
+  <p:cSld>
+    <p:bg>
+      <p:bgPr>
+        <a:solidFill>
+          <a:schemeClr val="bg2"/>
+        </a:solidFill>
+        <a:effectLst/>
+      </p:bgPr>
+    </p:bg>
+    <p:spTree>
+      <p:nvGrpSpPr>
+        <p:cNvPr id="1" name="">
+          <a:extLst>
+            <a:ext uri="{FF2B5EF4-FFF2-40B4-BE49-F238E27FC236}">
+              <a16:creationId xmlns:a16="http://schemas.microsoft.com/office/drawing/2014/main" id="{6B8756B7-3D8F-35B4-097D-F33C69D625EF}"/>
+            </a:ext>
+          </a:extLst>
+        </p:cNvPr>
+        <p:cNvGrpSpPr/>
+        <p:nvPr/>
+      </p:nvGrpSpPr>
+      <p:grpSpPr>
+        <a:xfrm>
+          <a:off x="0" y="0"/>
+          <a:ext cx="0" cy="0"/>
+          <a:chOff x="0" y="0"/>
+          <a:chExt cx="0" cy="0"/>
+        </a:xfrm>
+      </p:grpSpPr>
+      <p:sp>
+        <p:nvSpPr>
+          <p:cNvPr id="1031" name="Rectangle 1030">
+            <a:extLst>
+              <a:ext uri="{FF2B5EF4-FFF2-40B4-BE49-F238E27FC236}">
+                <a16:creationId xmlns:a16="http://schemas.microsoft.com/office/drawing/2014/main" id="{5BE2A49E-0BD9-321C-F602-AFA2FCF9B27B}"/>
+              </a:ext>
+              <a:ext uri="{C183D7F6-B498-43B3-948B-1728B52AA6E4}">
+                <adec:decorative xmlns:adec="http://schemas.microsoft.com/office/drawing/2017/decorative" val="1"/>
+              </a:ext>
+            </a:extLst>
+          </p:cNvPr>
+          <p:cNvSpPr>
+            <a:spLocks noGrp="1" noRot="1" noChangeAspect="1" noMove="1" noResize="1" noEditPoints="1" noAdjustHandles="1" noChangeArrowheads="1" noChangeShapeType="1" noTextEdit="1"/>
+          </p:cNvSpPr>
+          <p:nvPr>
+            <p:extLst>
+              <p:ext uri="{386F3935-93C4-4BCD-93E2-E3B085C9AB24}">
+                <p16:designElem xmlns:p16="http://schemas.microsoft.com/office/powerpoint/2015/main" val="1"/>
+              </p:ext>
+            </p:extLst>
+          </p:nvPr>
+        </p:nvSpPr>
+        <p:spPr>
+          <a:xfrm>
+            <a:off x="933198" y="931857"/>
+            <a:ext cx="10326946" cy="4996302"/>
+          </a:xfrm>
+          <a:prstGeom prst="rect">
+            <a:avLst/>
+          </a:prstGeom>
+          <a:noFill/>
+          <a:ln w="38100">
+            <a:solidFill>
+              <a:schemeClr val="accent1">
+                <a:lumMod val="60000"/>
+                <a:lumOff val="40000"/>
+              </a:schemeClr>
+            </a:solidFill>
+          </a:ln>
+        </p:spPr>
+        <p:style>
+          <a:lnRef idx="2">
+            <a:schemeClr val="accent1">
+              <a:shade val="50000"/>
+            </a:schemeClr>
+          </a:lnRef>
+          <a:fillRef idx="1">
+            <a:schemeClr val="accent1"/>
+          </a:fillRef>
+          <a:effectRef idx="0">
+            <a:schemeClr val="accent1"/>
+          </a:effectRef>
+          <a:fontRef idx="minor">
+            <a:schemeClr val="lt1"/>
+          </a:fontRef>
+        </p:style>
+        <p:txBody>
+          <a:bodyPr rtlCol="0" anchor="ctr"/>
+          <a:lstStyle/>
+          <a:p>
+            <a:pPr algn="ctr"/>
+            <a:endParaRPr lang="en-US"/>
+          </a:p>
+        </p:txBody>
+      </p:sp>
+      <p:sp useBgFill="1">
+        <p:nvSpPr>
+          <p:cNvPr id="1033" name="Rectangle 1032">
+            <a:extLst>
+              <a:ext uri="{FF2B5EF4-FFF2-40B4-BE49-F238E27FC236}">
+                <a16:creationId xmlns:a16="http://schemas.microsoft.com/office/drawing/2014/main" id="{1E2C3B9A-B4D2-F54D-15F0-06653E183250}"/>
+              </a:ext>
+              <a:ext uri="{C183D7F6-B498-43B3-948B-1728B52AA6E4}">
+                <adec:decorative xmlns:adec="http://schemas.microsoft.com/office/drawing/2017/decorative" val="1"/>
+              </a:ext>
+            </a:extLst>
+          </p:cNvPr>
+          <p:cNvSpPr>
+            <a:spLocks noGrp="1" noRot="1" noChangeAspect="1" noMove="1" noResize="1" noEditPoints="1" noAdjustHandles="1" noChangeArrowheads="1" noChangeShapeType="1" noTextEdit="1"/>
+          </p:cNvSpPr>
+          <p:nvPr>
+            <p:extLst>
+              <p:ext uri="{386F3935-93C4-4BCD-93E2-E3B085C9AB24}">
+                <p16:designElem xmlns:p16="http://schemas.microsoft.com/office/powerpoint/2015/main" val="1"/>
+              </p:ext>
+            </p:extLst>
+          </p:nvPr>
+        </p:nvSpPr>
+        <p:spPr>
+          <a:xfrm>
+            <a:off x="0" y="0"/>
+            <a:ext cx="12192000" cy="6858000"/>
+          </a:xfrm>
+          <a:prstGeom prst="rect">
+            <a:avLst/>
+          </a:prstGeom>
+          <a:ln w="12700" cap="flat" cmpd="sng" algn="ctr">
+            <a:noFill/>
+            <a:prstDash val="solid"/>
+            <a:miter lim="800000"/>
+          </a:ln>
+          <a:effectLst/>
+          <a:extLst>
+            <a:ext uri="{91240B29-F687-4F45-9708-019B960494DF}">
+              <a14:hiddenLine xmlns:a14="http://schemas.microsoft.com/office/drawing/2010/main" w="12700" cap="flat" cmpd="sng" algn="ctr">
+                <a:solidFill>
+                  <a:schemeClr val="accent1">
+                    <a:shade val="50000"/>
+                  </a:schemeClr>
+                </a:solidFill>
+                <a:prstDash val="solid"/>
+                <a:miter lim="800000"/>
+              </a14:hiddenLine>
+            </a:ext>
+          </a:extLst>
+        </p:spPr>
+        <p:style>
+          <a:lnRef idx="2">
+            <a:schemeClr val="accent1">
+              <a:shade val="50000"/>
+            </a:schemeClr>
+          </a:lnRef>
+          <a:fillRef idx="1">
+            <a:schemeClr val="accent1"/>
+          </a:fillRef>
+          <a:effectRef idx="0">
+            <a:schemeClr val="accent1"/>
+          </a:effectRef>
+          <a:fontRef idx="minor">
+            <a:schemeClr val="lt1"/>
+          </a:fontRef>
+        </p:style>
+        <p:txBody>
+          <a:bodyPr rtlCol="0" anchor="ctr"/>
+          <a:lstStyle/>
+          <a:p>
+            <a:pPr algn="ctr"/>
+            <a:endParaRPr lang="en-US"/>
+          </a:p>
+        </p:txBody>
+      </p:sp>
+      <p:sp>
+        <p:nvSpPr>
+          <p:cNvPr id="1035" name="Rectangle 1034">
+            <a:extLst>
+              <a:ext uri="{FF2B5EF4-FFF2-40B4-BE49-F238E27FC236}">
+                <a16:creationId xmlns:a16="http://schemas.microsoft.com/office/drawing/2014/main" id="{0068CEB5-F191-9D3E-BAC0-B0E212720F36}"/>
+              </a:ext>
+              <a:ext uri="{C183D7F6-B498-43B3-948B-1728B52AA6E4}">
+                <adec:decorative xmlns:adec="http://schemas.microsoft.com/office/drawing/2017/decorative" val="1"/>
+              </a:ext>
+            </a:extLst>
+          </p:cNvPr>
+          <p:cNvSpPr>
+            <a:spLocks noGrp="1" noRot="1" noChangeAspect="1" noMove="1" noResize="1" noEditPoints="1" noAdjustHandles="1" noChangeArrowheads="1" noChangeShapeType="1" noTextEdit="1"/>
+          </p:cNvSpPr>
+          <p:nvPr>
+            <p:extLst>
+              <p:ext uri="{386F3935-93C4-4BCD-93E2-E3B085C9AB24}">
+                <p16:designElem xmlns:p16="http://schemas.microsoft.com/office/powerpoint/2015/main" val="1"/>
+              </p:ext>
+            </p:extLst>
+          </p:nvPr>
+        </p:nvSpPr>
+        <p:spPr>
+          <a:xfrm>
+            <a:off x="0" y="0"/>
+            <a:ext cx="4654294" cy="6858000"/>
+          </a:xfrm>
+          <a:prstGeom prst="rect">
+            <a:avLst/>
+          </a:prstGeom>
+          <a:solidFill>
+            <a:srgbClr val="000000"/>
+          </a:solidFill>
+          <a:ln>
+            <a:noFill/>
+          </a:ln>
+        </p:spPr>
+        <p:style>
+          <a:lnRef idx="2">
+            <a:schemeClr val="accent1">
+              <a:shade val="50000"/>
+            </a:schemeClr>
+          </a:lnRef>
+          <a:fillRef idx="1">
+            <a:schemeClr val="accent1"/>
+          </a:fillRef>
+          <a:effectRef idx="0">
+            <a:schemeClr val="accent1"/>
+          </a:effectRef>
+          <a:fontRef idx="minor">
+            <a:schemeClr val="lt1"/>
+          </a:fontRef>
+        </p:style>
+        <p:txBody>
+          <a:bodyPr rtlCol="0" anchor="ctr"/>
+          <a:lstStyle/>
+          <a:p>
+            <a:pPr algn="ctr"/>
+            <a:endParaRPr lang="en-US"/>
+          </a:p>
+        </p:txBody>
+      </p:sp>
+      <p:pic>
+        <p:nvPicPr>
+          <p:cNvPr id="1026" name="Picture 2" descr="Marveling at the Soaking Wet Rockettes of the Olympics - The New York Times">
+            <a:extLst>
+              <a:ext uri="{FF2B5EF4-FFF2-40B4-BE49-F238E27FC236}">
+                <a16:creationId xmlns:a16="http://schemas.microsoft.com/office/drawing/2014/main" id="{F4A78292-B164-E2B9-85FD-E6ACDB8A113E}"/>
+              </a:ext>
+            </a:extLst>
+          </p:cNvPr>
+          <p:cNvPicPr>
+            <a:picLocks noChangeAspect="1" noChangeArrowheads="1"/>
+          </p:cNvPicPr>
+          <p:nvPr/>
+        </p:nvPicPr>
+        <p:blipFill>
+          <a:blip r:embed="rId2">
+            <a:alphaModFix amt="50000"/>
+            <a:extLst>
+              <a:ext uri="{28A0092B-C50C-407E-A947-70E740481C1C}">
+                <a14:useLocalDpi xmlns:a14="http://schemas.microsoft.com/office/drawing/2010/main" val="0"/>
+              </a:ext>
+            </a:extLst>
+          </a:blip>
+          <a:srcRect l="31270" r="23428" b="-2"/>
+          <a:stretch/>
+        </p:blipFill>
+        <p:spPr bwMode="auto">
+          <a:xfrm>
+            <a:off x="20" y="-1"/>
+            <a:ext cx="4654276" cy="6857999"/>
+          </a:xfrm>
+          <a:prstGeom prst="rect">
+            <a:avLst/>
+          </a:prstGeom>
+          <a:noFill/>
+          <a:extLst>
+            <a:ext uri="{909E8E84-426E-40DD-AFC4-6F175D3DCCD1}">
+              <a14:hiddenFill xmlns:a14="http://schemas.microsoft.com/office/drawing/2010/main">
+                <a:solidFill>
+                  <a:srgbClr val="FFFFFF"/>
+                </a:solidFill>
+              </a14:hiddenFill>
+            </a:ext>
+          </a:extLst>
+        </p:spPr>
+      </p:pic>
+      <p:sp>
+        <p:nvSpPr>
+          <p:cNvPr id="1037" name="Freeform: Shape 1036">
+            <a:extLst>
+              <a:ext uri="{FF2B5EF4-FFF2-40B4-BE49-F238E27FC236}">
+                <a16:creationId xmlns:a16="http://schemas.microsoft.com/office/drawing/2014/main" id="{9464ED38-224B-AB8F-2B4A-18C5B2BE0BF4}"/>
+              </a:ext>
+              <a:ext uri="{C183D7F6-B498-43B3-948B-1728B52AA6E4}">
+                <adec:decorative xmlns:adec="http://schemas.microsoft.com/office/drawing/2017/decorative" val="1"/>
+              </a:ext>
+            </a:extLst>
+          </p:cNvPr>
+          <p:cNvSpPr>
+            <a:spLocks noGrp="1" noRot="1" noChangeAspect="1" noMove="1" noResize="1" noEditPoints="1" noAdjustHandles="1" noChangeArrowheads="1" noChangeShapeType="1" noTextEdit="1"/>
+          </p:cNvSpPr>
+          <p:nvPr>
+            <p:extLst>
+              <p:ext uri="{386F3935-93C4-4BCD-93E2-E3B085C9AB24}">
+                <p16:designElem xmlns:p16="http://schemas.microsoft.com/office/powerpoint/2015/main" val="1"/>
+              </p:ext>
+            </p:extLst>
+          </p:nvPr>
+        </p:nvSpPr>
+        <p:spPr>
+          <a:xfrm flipH="1">
+            <a:off x="935884" y="931856"/>
+            <a:ext cx="10318890" cy="4994960"/>
+          </a:xfrm>
+          <a:custGeom>
+            <a:avLst/>
+            <a:gdLst>
+              <a:gd name="connsiteX0" fmla="*/ 0 w 4172596"/>
+              <a:gd name="connsiteY0" fmla="*/ 0 h 4952999"/>
+              <a:gd name="connsiteX1" fmla="*/ 4172596 w 4172596"/>
+              <a:gd name="connsiteY1" fmla="*/ 0 h 4952999"/>
+              <a:gd name="connsiteX2" fmla="*/ 4172596 w 4172596"/>
+              <a:gd name="connsiteY2" fmla="*/ 342900 h 4952999"/>
+              <a:gd name="connsiteX3" fmla="*/ 3239761 w 4172596"/>
+              <a:gd name="connsiteY3" fmla="*/ 342900 h 4952999"/>
+              <a:gd name="connsiteX4" fmla="*/ 3239761 w 4172596"/>
+              <a:gd name="connsiteY4" fmla="*/ 1934392 h 4952999"/>
+              <a:gd name="connsiteX5" fmla="*/ 4172596 w 4172596"/>
+              <a:gd name="connsiteY5" fmla="*/ 1934392 h 4952999"/>
+              <a:gd name="connsiteX6" fmla="*/ 4172596 w 4172596"/>
+              <a:gd name="connsiteY6" fmla="*/ 4952999 h 4952999"/>
+              <a:gd name="connsiteX7" fmla="*/ 0 w 4172596"/>
+              <a:gd name="connsiteY7" fmla="*/ 4952999 h 4952999"/>
+              <a:gd name="connsiteX0" fmla="*/ 3239761 w 4172596"/>
+              <a:gd name="connsiteY0" fmla="*/ 1934392 h 4952999"/>
+              <a:gd name="connsiteX1" fmla="*/ 4172596 w 4172596"/>
+              <a:gd name="connsiteY1" fmla="*/ 1934392 h 4952999"/>
+              <a:gd name="connsiteX2" fmla="*/ 4172596 w 4172596"/>
+              <a:gd name="connsiteY2" fmla="*/ 4952999 h 4952999"/>
+              <a:gd name="connsiteX3" fmla="*/ 0 w 4172596"/>
+              <a:gd name="connsiteY3" fmla="*/ 4952999 h 4952999"/>
+              <a:gd name="connsiteX4" fmla="*/ 0 w 4172596"/>
+              <a:gd name="connsiteY4" fmla="*/ 0 h 4952999"/>
+              <a:gd name="connsiteX5" fmla="*/ 4172596 w 4172596"/>
+              <a:gd name="connsiteY5" fmla="*/ 0 h 4952999"/>
+              <a:gd name="connsiteX6" fmla="*/ 4172596 w 4172596"/>
+              <a:gd name="connsiteY6" fmla="*/ 342900 h 4952999"/>
+              <a:gd name="connsiteX7" fmla="*/ 3239761 w 4172596"/>
+              <a:gd name="connsiteY7" fmla="*/ 342900 h 4952999"/>
+              <a:gd name="connsiteX8" fmla="*/ 3331201 w 4172596"/>
+              <a:gd name="connsiteY8" fmla="*/ 2025832 h 4952999"/>
+              <a:gd name="connsiteX0" fmla="*/ 3239761 w 4172596"/>
+              <a:gd name="connsiteY0" fmla="*/ 1934392 h 4952999"/>
+              <a:gd name="connsiteX1" fmla="*/ 4172596 w 4172596"/>
+              <a:gd name="connsiteY1" fmla="*/ 1934392 h 4952999"/>
+              <a:gd name="connsiteX2" fmla="*/ 4172596 w 4172596"/>
+              <a:gd name="connsiteY2" fmla="*/ 4952999 h 4952999"/>
+              <a:gd name="connsiteX3" fmla="*/ 0 w 4172596"/>
+              <a:gd name="connsiteY3" fmla="*/ 4952999 h 4952999"/>
+              <a:gd name="connsiteX4" fmla="*/ 0 w 4172596"/>
+              <a:gd name="connsiteY4" fmla="*/ 0 h 4952999"/>
+              <a:gd name="connsiteX5" fmla="*/ 4172596 w 4172596"/>
+              <a:gd name="connsiteY5" fmla="*/ 0 h 4952999"/>
+              <a:gd name="connsiteX6" fmla="*/ 4172596 w 4172596"/>
+              <a:gd name="connsiteY6" fmla="*/ 342900 h 4952999"/>
+              <a:gd name="connsiteX7" fmla="*/ 3239761 w 4172596"/>
+              <a:gd name="connsiteY7" fmla="*/ 342900 h 4952999"/>
+              <a:gd name="connsiteX0" fmla="*/ 4172596 w 4172596"/>
+              <a:gd name="connsiteY0" fmla="*/ 1934392 h 4952999"/>
+              <a:gd name="connsiteX1" fmla="*/ 4172596 w 4172596"/>
+              <a:gd name="connsiteY1" fmla="*/ 4952999 h 4952999"/>
+              <a:gd name="connsiteX2" fmla="*/ 0 w 4172596"/>
+              <a:gd name="connsiteY2" fmla="*/ 4952999 h 4952999"/>
+              <a:gd name="connsiteX3" fmla="*/ 0 w 4172596"/>
+              <a:gd name="connsiteY3" fmla="*/ 0 h 4952999"/>
+              <a:gd name="connsiteX4" fmla="*/ 4172596 w 4172596"/>
+              <a:gd name="connsiteY4" fmla="*/ 0 h 4952999"/>
+              <a:gd name="connsiteX5" fmla="*/ 4172596 w 4172596"/>
+              <a:gd name="connsiteY5" fmla="*/ 342900 h 4952999"/>
+              <a:gd name="connsiteX6" fmla="*/ 3239761 w 4172596"/>
+              <a:gd name="connsiteY6" fmla="*/ 342900 h 4952999"/>
+              <a:gd name="connsiteX0" fmla="*/ 4172596 w 4172596"/>
+              <a:gd name="connsiteY0" fmla="*/ 1934392 h 4952999"/>
+              <a:gd name="connsiteX1" fmla="*/ 4172596 w 4172596"/>
+              <a:gd name="connsiteY1" fmla="*/ 4952999 h 4952999"/>
+              <a:gd name="connsiteX2" fmla="*/ 0 w 4172596"/>
+              <a:gd name="connsiteY2" fmla="*/ 4952999 h 4952999"/>
+              <a:gd name="connsiteX3" fmla="*/ 0 w 4172596"/>
+              <a:gd name="connsiteY3" fmla="*/ 0 h 4952999"/>
+              <a:gd name="connsiteX4" fmla="*/ 4172596 w 4172596"/>
+              <a:gd name="connsiteY4" fmla="*/ 0 h 4952999"/>
+              <a:gd name="connsiteX5" fmla="*/ 4172596 w 4172596"/>
+              <a:gd name="connsiteY5" fmla="*/ 342900 h 4952999"/>
+            </a:gdLst>
+            <a:ahLst/>
+            <a:cxnLst>
+              <a:cxn ang="0">
+                <a:pos x="connsiteX0" y="connsiteY0"/>
+              </a:cxn>
+              <a:cxn ang="0">
+                <a:pos x="connsiteX1" y="connsiteY1"/>
+              </a:cxn>
+              <a:cxn ang="0">
+                <a:pos x="connsiteX2" y="connsiteY2"/>
+              </a:cxn>
+              <a:cxn ang="0">
+                <a:pos x="connsiteX3" y="connsiteY3"/>
+              </a:cxn>
+              <a:cxn ang="0">
+                <a:pos x="connsiteX4" y="connsiteY4"/>
+              </a:cxn>
+              <a:cxn ang="0">
+                <a:pos x="connsiteX5" y="connsiteY5"/>
+              </a:cxn>
+            </a:cxnLst>
+            <a:rect l="l" t="t" r="r" b="b"/>
+            <a:pathLst>
+              <a:path w="4172596" h="4952999">
+                <a:moveTo>
+                  <a:pt x="4172596" y="1934392"/>
+                </a:moveTo>
+                <a:lnTo>
+                  <a:pt x="4172596" y="4952999"/>
+                </a:lnTo>
+                <a:lnTo>
+                  <a:pt x="0" y="4952999"/>
+                </a:lnTo>
+                <a:lnTo>
+                  <a:pt x="0" y="0"/>
+                </a:lnTo>
+                <a:lnTo>
+                  <a:pt x="4172596" y="0"/>
+                </a:lnTo>
+                <a:lnTo>
+                  <a:pt x="4172596" y="342900"/>
+                </a:lnTo>
+              </a:path>
+            </a:pathLst>
+          </a:custGeom>
+          <a:noFill/>
+          <a:ln w="38100">
+            <a:solidFill>
+              <a:schemeClr val="accent1">
+                <a:lumMod val="60000"/>
+                <a:lumOff val="40000"/>
+              </a:schemeClr>
+            </a:solidFill>
+          </a:ln>
+        </p:spPr>
+        <p:style>
+          <a:lnRef idx="2">
+            <a:schemeClr val="accent1">
+              <a:shade val="50000"/>
+            </a:schemeClr>
+          </a:lnRef>
+          <a:fillRef idx="1">
+            <a:schemeClr val="accent1"/>
+          </a:fillRef>
+          <a:effectRef idx="0">
+            <a:schemeClr val="accent1"/>
+          </a:effectRef>
+          <a:fontRef idx="minor">
+            <a:schemeClr val="lt1"/>
+          </a:fontRef>
+        </p:style>
+        <p:txBody>
+          <a:bodyPr wrap="square" rtlCol="0" anchor="ctr">
+            <a:noAutofit/>
+          </a:bodyPr>
+          <a:lstStyle/>
+          <a:p>
+            <a:pPr algn="ctr"/>
+            <a:endParaRPr lang="en-US"/>
+          </a:p>
+        </p:txBody>
+      </p:sp>
+      <p:sp>
+        <p:nvSpPr>
+          <p:cNvPr id="5" name="Title 4">
+            <a:extLst>
+              <a:ext uri="{FF2B5EF4-FFF2-40B4-BE49-F238E27FC236}">
+                <a16:creationId xmlns:a16="http://schemas.microsoft.com/office/drawing/2014/main" id="{9D42EFBF-22E1-CF40-BDC6-6A4375CE9C2C}"/>
+              </a:ext>
+            </a:extLst>
+          </p:cNvPr>
+          <p:cNvSpPr>
+            <a:spLocks noGrp="1"/>
+          </p:cNvSpPr>
+          <p:nvPr>
+            <p:ph type="title"/>
+          </p:nvPr>
+        </p:nvSpPr>
+        <p:spPr>
+          <a:xfrm>
+            <a:off x="738786" y="1319622"/>
+            <a:ext cx="3481988" cy="1591492"/>
+          </a:xfrm>
+          <a:noFill/>
+        </p:spPr>
+        <p:txBody>
+          <a:bodyPr vert="horz" lIns="91440" tIns="45720" rIns="91440" bIns="45720" rtlCol="0" anchor="b">
+            <a:normAutofit/>
+          </a:bodyPr>
+          <a:lstStyle/>
+          <a:p>
+            <a:r>
+              <a:rPr lang="en-US" b="1" kern="1200" cap="all" spc="500" baseline="0" dirty="0">
+                <a:solidFill>
+                  <a:schemeClr val="accent1">
+                    <a:lumMod val="60000"/>
+                    <a:lumOff val="40000"/>
+                  </a:schemeClr>
+                </a:solidFill>
+                <a:latin typeface="+mj-lt"/>
+                <a:ea typeface="+mj-ea"/>
+                <a:cs typeface="+mj-cs"/>
+              </a:rPr>
+              <a:t>Learning Benefits</a:t>
+            </a:r>
+            <a:br>
+              <a:rPr lang="en-US" b="1" kern="1200" cap="all" spc="500" baseline="0" dirty="0">
+                <a:solidFill>
+                  <a:schemeClr val="accent1">
+                    <a:lumMod val="60000"/>
+                    <a:lumOff val="40000"/>
+                  </a:schemeClr>
+                </a:solidFill>
+                <a:latin typeface="+mj-lt"/>
+                <a:ea typeface="+mj-ea"/>
+                <a:cs typeface="+mj-cs"/>
+              </a:rPr>
+            </a:br>
+            <a:endParaRPr lang="en-US" b="1" kern="1200" cap="all" spc="500" baseline="0" dirty="0">
+              <a:solidFill>
+                <a:schemeClr val="accent1">
+                  <a:lumMod val="60000"/>
+                  <a:lumOff val="40000"/>
+                </a:schemeClr>
+              </a:solidFill>
+              <a:latin typeface="+mj-lt"/>
+              <a:ea typeface="+mj-ea"/>
+              <a:cs typeface="+mj-cs"/>
+            </a:endParaRPr>
+          </a:p>
+        </p:txBody>
+      </p:sp>
+      <p:sp>
+        <p:nvSpPr>
+          <p:cNvPr id="3" name="TextBox 2">
+            <a:extLst>
+              <a:ext uri="{FF2B5EF4-FFF2-40B4-BE49-F238E27FC236}">
+                <a16:creationId xmlns:a16="http://schemas.microsoft.com/office/drawing/2014/main" id="{0F85F35F-8A3F-7F1B-4AA7-414F4B64F533}"/>
+              </a:ext>
+            </a:extLst>
+          </p:cNvPr>
+          <p:cNvSpPr txBox="1"/>
+          <p:nvPr/>
+        </p:nvSpPr>
+        <p:spPr>
+          <a:xfrm>
+            <a:off x="4925589" y="1430639"/>
+            <a:ext cx="5518574" cy="4084335"/>
+          </a:xfrm>
+          <a:prstGeom prst="rect">
+            <a:avLst/>
+          </a:prstGeom>
+        </p:spPr>
+        <p:txBody>
+          <a:bodyPr vert="horz" lIns="91440" tIns="45720" rIns="91440" bIns="45720" rtlCol="0">
+            <a:normAutofit fontScale="92500" lnSpcReduction="20000"/>
+          </a:bodyPr>
+          <a:lstStyle/>
+          <a:p>
+            <a:pPr indent="-228600">
+              <a:lnSpc>
+                <a:spcPct val="120000"/>
+              </a:lnSpc>
+              <a:spcAft>
+                <a:spcPts val="600"/>
+              </a:spcAft>
+              <a:buFont typeface="Arial" panose="020B0604020202020204" pitchFamily="34" charset="0"/>
+              <a:buChar char="•"/>
+            </a:pPr>
+            <a:r>
+              <a:rPr lang="en-US" sz="2000" b="1" dirty="0"/>
+              <a:t>When we all see the same error messages, we can help each other more effectively</a:t>
+            </a:r>
+          </a:p>
+          <a:p>
+            <a:pPr indent="-228600">
+              <a:lnSpc>
+                <a:spcPct val="120000"/>
+              </a:lnSpc>
+              <a:spcAft>
+                <a:spcPts val="600"/>
+              </a:spcAft>
+              <a:buFont typeface="Arial" panose="020B0604020202020204" pitchFamily="34" charset="0"/>
+              <a:buChar char="•"/>
+            </a:pPr>
+            <a:endParaRPr lang="en-US" sz="2000" b="1" dirty="0"/>
+          </a:p>
+          <a:p>
+            <a:pPr indent="-228600">
+              <a:lnSpc>
+                <a:spcPct val="120000"/>
+              </a:lnSpc>
+              <a:spcAft>
+                <a:spcPts val="600"/>
+              </a:spcAft>
+              <a:buFont typeface="Arial" panose="020B0604020202020204" pitchFamily="34" charset="0"/>
+              <a:buChar char="•"/>
+            </a:pPr>
+            <a:r>
+              <a:rPr lang="en-US" sz="2000" b="1" dirty="0"/>
+              <a:t>Screen sharing and code sharing just work, without version compatibility headaches</a:t>
+            </a:r>
+          </a:p>
+          <a:p>
+            <a:pPr indent="-228600">
+              <a:lnSpc>
+                <a:spcPct val="120000"/>
+              </a:lnSpc>
+              <a:spcAft>
+                <a:spcPts val="600"/>
+              </a:spcAft>
+              <a:buFont typeface="Arial" panose="020B0604020202020204" pitchFamily="34" charset="0"/>
+              <a:buChar char="•"/>
+            </a:pPr>
+            <a:endParaRPr lang="en-US" sz="2000" b="1" dirty="0"/>
+          </a:p>
+          <a:p>
+            <a:pPr indent="-228600">
+              <a:lnSpc>
+                <a:spcPct val="120000"/>
+              </a:lnSpc>
+              <a:spcAft>
+                <a:spcPts val="600"/>
+              </a:spcAft>
+              <a:buFont typeface="Arial" panose="020B0604020202020204" pitchFamily="34" charset="0"/>
+              <a:buChar char="•"/>
+            </a:pPr>
+            <a:r>
+              <a:rPr lang="en-US" sz="2000" b="1" dirty="0"/>
+              <a:t>Following along with live coding is smoother when everyone's Python behaves the same way</a:t>
+            </a:r>
+          </a:p>
+          <a:p>
+            <a:pPr indent="-228600">
+              <a:lnSpc>
+                <a:spcPct val="120000"/>
+              </a:lnSpc>
+              <a:spcAft>
+                <a:spcPts val="600"/>
+              </a:spcAft>
+              <a:buFont typeface="Arial" panose="020B0604020202020204" pitchFamily="34" charset="0"/>
+              <a:buChar char="•"/>
+            </a:pPr>
+            <a:endParaRPr lang="en-US" sz="2000" b="1" dirty="0"/>
+          </a:p>
+          <a:p>
+            <a:pPr indent="-228600">
+              <a:lnSpc>
+                <a:spcPct val="120000"/>
+              </a:lnSpc>
+              <a:spcAft>
+                <a:spcPts val="600"/>
+              </a:spcAft>
+              <a:buFont typeface="Arial" panose="020B0604020202020204" pitchFamily="34" charset="0"/>
+              <a:buChar char="•"/>
+            </a:pPr>
+            <a:r>
+              <a:rPr lang="en-US" sz="2000" b="1" dirty="0"/>
+              <a:t>+ Most tech companies enforce specific development environments</a:t>
+            </a:r>
+          </a:p>
+          <a:p>
+            <a:pPr indent="-228600">
+              <a:lnSpc>
+                <a:spcPct val="120000"/>
+              </a:lnSpc>
+              <a:spcAft>
+                <a:spcPts val="600"/>
+              </a:spcAft>
+              <a:buFont typeface="Arial" panose="020B0604020202020204" pitchFamily="34" charset="0"/>
+              <a:buChar char="•"/>
+            </a:pPr>
+            <a:endParaRPr lang="en-US" dirty="0"/>
+          </a:p>
+        </p:txBody>
+      </p:sp>
+    </p:spTree>
+    <p:extLst>
+      <p:ext uri="{BB962C8B-B14F-4D97-AF65-F5344CB8AC3E}">
+        <p14:creationId xmlns:p14="http://schemas.microsoft.com/office/powerpoint/2010/main" val="3034059694"/>
+      </p:ext>
+    </p:extLst>
+  </p:cSld>
+  <p:clrMapOvr>
+    <a:masterClrMapping/>
+  </p:clrMapOvr>
+  <p:timing>
+    <p:tnLst>
+      <p:par>
+        <p:cTn id="1" dur="indefinite" restart="never" nodeType="tmRoot">
+          <p:childTnLst>
+            <p:seq concurrent="1" nextAc="seek">
+              <p:cTn id="2" dur="indefinite" nodeType="mainSeq">
+                <p:childTnLst>
+                  <p:par>
+                    <p:cTn id="3" fill="hold">
+                      <p:stCondLst>
+                        <p:cond delay="indefinite"/>
+                      </p:stCondLst>
+                      <p:childTnLst>
+                        <p:par>
+                          <p:cTn id="4" fill="hold">
+                            <p:stCondLst>
+                              <p:cond delay="0"/>
+                            </p:stCondLst>
+                            <p:childTnLst>
+                              <p:par>
+                                <p:cTn id="5" presetID="1" presetClass="entr" presetSubtype="0" fill="hold" nodeType="clickEffect">
+                                  <p:stCondLst>
+                                    <p:cond delay="0"/>
+                                  </p:stCondLst>
+                                  <p:childTnLst>
+                                    <p:set>
+                                      <p:cBhvr>
+                                        <p:cTn id="6" dur="1" fill="hold">
+                                          <p:stCondLst>
+                                            <p:cond delay="0"/>
+                                          </p:stCondLst>
+                                        </p:cTn>
+                                        <p:tgtEl>
+                                          <p:spTgt spid="3">
+                                            <p:txEl>
+                                              <p:pRg st="6" end="6"/>
+                                            </p:txEl>
+                                          </p:spTgt>
+                                        </p:tgtEl>
+                                        <p:attrNameLst>
+                                          <p:attrName>style.visibility</p:attrName>
+                                        </p:attrNameLst>
+                                      </p:cBhvr>
+                                      <p:to>
+                                        <p:strVal val="visible"/>
+                                      </p:to>
+                                    </p:set>
+                                  </p:childTnLst>
+                                </p:cTn>
+                              </p:par>
+                            </p:childTnLst>
+                          </p:cTn>
+                        </p:par>
+                      </p:childTnLst>
+                    </p:cTn>
+                  </p:par>
+                </p:childTnLst>
+              </p:cTn>
+              <p:prevCondLst>
+                <p:cond evt="onPrev" delay="0">
+                  <p:tgtEl>
+                    <p:sldTgt/>
+                  </p:tgtEl>
+                </p:cond>
+              </p:prevCondLst>
+              <p:nextCondLst>
+                <p:cond evt="onNext" delay="0">
+                  <p:tgtEl>
+                    <p:sldTgt/>
+                  </p:tgtEl>
+                </p:cond>
+              </p:nextCondLst>
+            </p:seq>
+          </p:childTnLst>
+        </p:cTn>
+      </p:par>
+    </p:tnLst>
+  </p:timing>
+</p:sld>
+</file>
+
+<file path=ppt/slides/slide15.xml><?xml version="1.0" encoding="utf-8"?>
+<p:sld xmlns:a="http://schemas.openxmlformats.org/drawingml/2006/main" xmlns:r="http://schemas.openxmlformats.org/officeDocument/2006/relationships" xmlns:p="http://schemas.openxmlformats.org/presentationml/2006/main">
+  <p:cSld>
+    <p:spTree>
+      <p:nvGrpSpPr>
+        <p:cNvPr id="1" name=""/>
+        <p:cNvGrpSpPr/>
+        <p:nvPr/>
+      </p:nvGrpSpPr>
+      <p:grpSpPr>
+        <a:xfrm>
+          <a:off x="0" y="0"/>
+          <a:ext cx="0" cy="0"/>
+          <a:chOff x="0" y="0"/>
+          <a:chExt cx="0" cy="0"/>
+        </a:xfrm>
+      </p:grpSpPr>
+      <p:sp>
+        <p:nvSpPr>
+          <p:cNvPr id="2" name="Title 1">
+            <a:extLst>
+              <a:ext uri="{FF2B5EF4-FFF2-40B4-BE49-F238E27FC236}">
+                <a16:creationId xmlns:a16="http://schemas.microsoft.com/office/drawing/2014/main" id="{81C6C416-7C5A-9F63-C33D-2BAA4196F119}"/>
+              </a:ext>
+            </a:extLst>
+          </p:cNvPr>
+          <p:cNvSpPr>
+            <a:spLocks noGrp="1"/>
+          </p:cNvSpPr>
+          <p:nvPr>
+            <p:ph type="title"/>
+          </p:nvPr>
+        </p:nvSpPr>
+        <p:spPr>
+          <a:xfrm>
+            <a:off x="1334692" y="0"/>
+            <a:ext cx="8977511" cy="756239"/>
+          </a:xfrm>
+        </p:spPr>
+        <p:txBody>
+          <a:bodyPr/>
+          <a:lstStyle/>
+          <a:p>
+            <a:r>
+              <a:rPr lang="en-US" dirty="0"/>
+              <a:t>3 types of command lines</a:t>
+            </a:r>
+          </a:p>
+        </p:txBody>
+      </p:sp>
+      <p:pic>
+        <p:nvPicPr>
+          <p:cNvPr id="3074" name="Picture 2" descr="Símbolo del sistema de Windows - Wikipedia, la enciclopedia libre">
+            <a:extLst>
+              <a:ext uri="{FF2B5EF4-FFF2-40B4-BE49-F238E27FC236}">
+                <a16:creationId xmlns:a16="http://schemas.microsoft.com/office/drawing/2014/main" id="{E54C27FC-6175-250C-82A1-30AC8FD2BF1B}"/>
+              </a:ext>
+            </a:extLst>
+          </p:cNvPr>
+          <p:cNvPicPr>
+            <a:picLocks noChangeAspect="1" noChangeArrowheads="1"/>
+          </p:cNvPicPr>
+          <p:nvPr/>
+        </p:nvPicPr>
+        <p:blipFill rotWithShape="1">
+          <a:blip r:embed="rId2">
+            <a:extLst>
+              <a:ext uri="{28A0092B-C50C-407E-A947-70E740481C1C}">
+                <a14:useLocalDpi xmlns:a14="http://schemas.microsoft.com/office/drawing/2010/main" val="0"/>
+              </a:ext>
+            </a:extLst>
+          </a:blip>
+          <a:srcRect r="35584"/>
+          <a:stretch/>
+        </p:blipFill>
+        <p:spPr bwMode="auto">
+          <a:xfrm>
+            <a:off x="1053901" y="1500186"/>
+            <a:ext cx="3946724" cy="3140075"/>
+          </a:xfrm>
+          <a:prstGeom prst="rect">
+            <a:avLst/>
+          </a:prstGeom>
+          <a:noFill/>
+          <a:extLst>
+            <a:ext uri="{909E8E84-426E-40DD-AFC4-6F175D3DCCD1}">
+              <a14:hiddenFill xmlns:a14="http://schemas.microsoft.com/office/drawing/2010/main">
+                <a:solidFill>
+                  <a:srgbClr val="FFFFFF"/>
+                </a:solidFill>
+              </a14:hiddenFill>
+            </a:ext>
+          </a:extLst>
+        </p:spPr>
+      </p:pic>
+      <p:sp>
+        <p:nvSpPr>
+          <p:cNvPr id="3" name="TextBox 2">
+            <a:extLst>
+              <a:ext uri="{FF2B5EF4-FFF2-40B4-BE49-F238E27FC236}">
+                <a16:creationId xmlns:a16="http://schemas.microsoft.com/office/drawing/2014/main" id="{8C2D4BAB-ADF1-984C-7D79-0E94A8374ACA}"/>
+              </a:ext>
+            </a:extLst>
+          </p:cNvPr>
+          <p:cNvSpPr txBox="1"/>
+          <p:nvPr/>
+        </p:nvSpPr>
+        <p:spPr>
+          <a:xfrm>
+            <a:off x="1053901" y="1130854"/>
+            <a:ext cx="863121" cy="369332"/>
+          </a:xfrm>
+          <a:prstGeom prst="rect">
+            <a:avLst/>
+          </a:prstGeom>
+          <a:noFill/>
+        </p:spPr>
+        <p:txBody>
+          <a:bodyPr wrap="none" rtlCol="0">
+            <a:spAutoFit/>
+          </a:bodyPr>
+          <a:lstStyle/>
+          <a:p>
+            <a:r>
+              <a:rPr lang="en-US" dirty="0"/>
+              <a:t>1. </a:t>
+            </a:r>
+            <a:r>
+              <a:rPr lang="en-US" dirty="0" err="1"/>
+              <a:t>cmd</a:t>
+            </a:r>
+            <a:endParaRPr lang="en-US" dirty="0"/>
+          </a:p>
+        </p:txBody>
+      </p:sp>
+      <p:sp>
+        <p:nvSpPr>
+          <p:cNvPr id="4" name="TextBox 3">
+            <a:extLst>
+              <a:ext uri="{FF2B5EF4-FFF2-40B4-BE49-F238E27FC236}">
+                <a16:creationId xmlns:a16="http://schemas.microsoft.com/office/drawing/2014/main" id="{D99FDC2B-BD3B-1925-6E73-FBB78A03E36E}"/>
+              </a:ext>
+            </a:extLst>
+          </p:cNvPr>
+          <p:cNvSpPr txBox="1"/>
+          <p:nvPr/>
+        </p:nvSpPr>
+        <p:spPr>
+          <a:xfrm>
+            <a:off x="6415088" y="1131924"/>
+            <a:ext cx="933269" cy="369332"/>
+          </a:xfrm>
+          <a:prstGeom prst="rect">
+            <a:avLst/>
+          </a:prstGeom>
+          <a:noFill/>
+        </p:spPr>
+        <p:txBody>
+          <a:bodyPr wrap="none" rtlCol="0">
+            <a:spAutoFit/>
+          </a:bodyPr>
+          <a:lstStyle/>
+          <a:p>
+            <a:r>
+              <a:rPr lang="en-US" dirty="0"/>
+              <a:t>2.Bash </a:t>
+            </a:r>
+          </a:p>
+        </p:txBody>
+      </p:sp>
+      <p:pic>
+        <p:nvPicPr>
+          <p:cNvPr id="3078" name="Picture 6" descr="Terminal User Guide for Mac - Apple Support">
+            <a:extLst>
+              <a:ext uri="{FF2B5EF4-FFF2-40B4-BE49-F238E27FC236}">
+                <a16:creationId xmlns:a16="http://schemas.microsoft.com/office/drawing/2014/main" id="{7B1B4437-4A00-FDE8-BC4E-8C2D7334F2BE}"/>
+              </a:ext>
+            </a:extLst>
+          </p:cNvPr>
+          <p:cNvPicPr>
+            <a:picLocks noChangeAspect="1" noChangeArrowheads="1"/>
+          </p:cNvPicPr>
+          <p:nvPr/>
+        </p:nvPicPr>
+        <p:blipFill rotWithShape="1">
+          <a:blip r:embed="rId3">
+            <a:extLst>
+              <a:ext uri="{28A0092B-C50C-407E-A947-70E740481C1C}">
+                <a14:useLocalDpi xmlns:a14="http://schemas.microsoft.com/office/drawing/2010/main" val="0"/>
+              </a:ext>
+            </a:extLst>
+          </a:blip>
+          <a:srcRect l="-1" r="19262" b="16354"/>
+          <a:stretch/>
+        </p:blipFill>
+        <p:spPr bwMode="auto">
+          <a:xfrm>
+            <a:off x="6424794" y="1500186"/>
+            <a:ext cx="3651957" cy="2411414"/>
+          </a:xfrm>
+          <a:prstGeom prst="rect">
+            <a:avLst/>
+          </a:prstGeom>
+          <a:noFill/>
+          <a:extLst>
+            <a:ext uri="{909E8E84-426E-40DD-AFC4-6F175D3DCCD1}">
+              <a14:hiddenFill xmlns:a14="http://schemas.microsoft.com/office/drawing/2010/main">
+                <a:solidFill>
+                  <a:srgbClr val="FFFFFF"/>
+                </a:solidFill>
+              </a14:hiddenFill>
+            </a:ext>
+          </a:extLst>
+        </p:spPr>
+      </p:pic>
+      <p:sp>
+        <p:nvSpPr>
+          <p:cNvPr id="7" name="TextBox 6">
+            <a:extLst>
+              <a:ext uri="{FF2B5EF4-FFF2-40B4-BE49-F238E27FC236}">
+                <a16:creationId xmlns:a16="http://schemas.microsoft.com/office/drawing/2014/main" id="{8B0A951A-DDCC-C190-3F7F-1BCA1978F0F4}"/>
+              </a:ext>
+            </a:extLst>
+          </p:cNvPr>
+          <p:cNvSpPr txBox="1"/>
+          <p:nvPr/>
+        </p:nvSpPr>
+        <p:spPr>
+          <a:xfrm>
+            <a:off x="1174158" y="5384208"/>
+            <a:ext cx="1485728" cy="369332"/>
+          </a:xfrm>
+          <a:prstGeom prst="rect">
+            <a:avLst/>
+          </a:prstGeom>
+          <a:noFill/>
+        </p:spPr>
+        <p:txBody>
+          <a:bodyPr wrap="none" rtlCol="0">
+            <a:spAutoFit/>
+          </a:bodyPr>
+          <a:lstStyle/>
+          <a:p>
+            <a:r>
+              <a:rPr lang="en-US" strike="sngStrike" dirty="0"/>
+              <a:t>3. </a:t>
+            </a:r>
+            <a:r>
+              <a:rPr lang="en-US" strike="sngStrike" dirty="0" err="1"/>
+              <a:t>Powershell</a:t>
+            </a:r>
+            <a:endParaRPr lang="en-US" strike="sngStrike" dirty="0"/>
+          </a:p>
+        </p:txBody>
+      </p:sp>
+      <p:pic>
+        <p:nvPicPr>
+          <p:cNvPr id="3080" name="Picture 8" descr="How to Customize Your WSL Terminal Window">
+            <a:extLst>
+              <a:ext uri="{FF2B5EF4-FFF2-40B4-BE49-F238E27FC236}">
+                <a16:creationId xmlns:a16="http://schemas.microsoft.com/office/drawing/2014/main" id="{25FC3205-FF9C-BA98-2F51-6A839F3473F5}"/>
+              </a:ext>
+            </a:extLst>
+          </p:cNvPr>
+          <p:cNvPicPr>
+            <a:picLocks noChangeAspect="1" noChangeArrowheads="1"/>
+          </p:cNvPicPr>
+          <p:nvPr/>
+        </p:nvPicPr>
+        <p:blipFill rotWithShape="1">
+          <a:blip r:embed="rId4">
+            <a:extLst>
+              <a:ext uri="{28A0092B-C50C-407E-A947-70E740481C1C}">
+                <a14:useLocalDpi xmlns:a14="http://schemas.microsoft.com/office/drawing/2010/main" val="0"/>
+              </a:ext>
+            </a:extLst>
+          </a:blip>
+          <a:srcRect r="29586"/>
+          <a:stretch/>
+        </p:blipFill>
+        <p:spPr bwMode="auto">
+          <a:xfrm>
+            <a:off x="7871254" y="3169599"/>
+            <a:ext cx="3354675" cy="2724573"/>
+          </a:xfrm>
+          <a:prstGeom prst="rect">
+            <a:avLst/>
+          </a:prstGeom>
+          <a:noFill/>
+          <a:extLst>
+            <a:ext uri="{909E8E84-426E-40DD-AFC4-6F175D3DCCD1}">
+              <a14:hiddenFill xmlns:a14="http://schemas.microsoft.com/office/drawing/2010/main">
+                <a:solidFill>
+                  <a:srgbClr val="FFFFFF"/>
+                </a:solidFill>
+              </a14:hiddenFill>
+            </a:ext>
+          </a:extLst>
+        </p:spPr>
+      </p:pic>
+    </p:spTree>
+    <p:extLst>
+      <p:ext uri="{BB962C8B-B14F-4D97-AF65-F5344CB8AC3E}">
+        <p14:creationId xmlns:p14="http://schemas.microsoft.com/office/powerpoint/2010/main" val="1015664845"/>
+      </p:ext>
+    </p:extLst>
+  </p:cSld>
+  <p:clrMapOvr>
+    <a:masterClrMapping/>
+  </p:clrMapOvr>
+  <p:timing>
+    <p:tnLst>
+      <p:par>
+        <p:cTn id="1" dur="indefinite" restart="never" nodeType="tmRoot">
+          <p:childTnLst>
+            <p:seq concurrent="1" nextAc="seek">
+              <p:cTn id="2" dur="indefinite" nodeType="mainSeq">
+                <p:childTnLst>
+                  <p:par>
+                    <p:cTn id="3" fill="hold">
+                      <p:stCondLst>
+                        <p:cond delay="indefinite"/>
+                      </p:stCondLst>
+                      <p:childTnLst>
+                        <p:par>
+                          <p:cTn id="4" fill="hold">
+                            <p:stCondLst>
+                              <p:cond delay="0"/>
+                            </p:stCondLst>
+                            <p:childTnLst>
+                              <p:par>
+                                <p:cTn id="5" presetID="1" presetClass="entr" presetSubtype="0" fill="hold" nodeType="clickEffect">
+                                  <p:stCondLst>
+                                    <p:cond delay="0"/>
+                                  </p:stCondLst>
+                                  <p:childTnLst>
+                                    <p:set>
+                                      <p:cBhvr>
+                                        <p:cTn id="6" dur="1" fill="hold">
+                                          <p:stCondLst>
+                                            <p:cond delay="0"/>
+                                          </p:stCondLst>
+                                        </p:cTn>
+                                        <p:tgtEl>
+                                          <p:spTgt spid="3074"/>
+                                        </p:tgtEl>
+                                        <p:attrNameLst>
+                                          <p:attrName>style.visibility</p:attrName>
+                                        </p:attrNameLst>
+                                      </p:cBhvr>
+                                      <p:to>
+                                        <p:strVal val="visible"/>
+                                      </p:to>
+                                    </p:set>
+                                  </p:childTnLst>
+                                </p:cTn>
+                              </p:par>
+                              <p:par>
+                                <p:cTn id="7" presetID="1" presetClass="entr" presetSubtype="0" fill="hold" grpId="0" nodeType="withEffect">
+                                  <p:stCondLst>
+                                    <p:cond delay="0"/>
+                                  </p:stCondLst>
+                                  <p:childTnLst>
+                                    <p:set>
+                                      <p:cBhvr>
+                                        <p:cTn id="8" dur="1" fill="hold">
+                                          <p:stCondLst>
+                                            <p:cond delay="0"/>
+                                          </p:stCondLst>
+                                        </p:cTn>
+                                        <p:tgtEl>
+                                          <p:spTgt spid="3"/>
+                                        </p:tgtEl>
+                                        <p:attrNameLst>
+                                          <p:attrName>style.visibility</p:attrName>
+                                        </p:attrNameLst>
+                                      </p:cBhvr>
+                                      <p:to>
+                                        <p:strVal val="visible"/>
+                                      </p:to>
+                                    </p:set>
+                                  </p:childTnLst>
+                                </p:cTn>
+                              </p:par>
+                            </p:childTnLst>
+                          </p:cTn>
+                        </p:par>
+                      </p:childTnLst>
+                    </p:cTn>
+                  </p:par>
+                  <p:par>
+                    <p:cTn id="9" fill="hold">
+                      <p:stCondLst>
+                        <p:cond delay="indefinite"/>
+                      </p:stCondLst>
+                      <p:childTnLst>
+                        <p:par>
+                          <p:cTn id="10" fill="hold">
+                            <p:stCondLst>
+                              <p:cond delay="0"/>
+                            </p:stCondLst>
+                            <p:childTnLst>
+                              <p:par>
+                                <p:cTn id="11" presetID="1" presetClass="entr" presetSubtype="0" fill="hold" grpId="0" nodeType="clickEffect">
+                                  <p:stCondLst>
+                                    <p:cond delay="0"/>
+                                  </p:stCondLst>
+                                  <p:childTnLst>
+                                    <p:set>
+                                      <p:cBhvr>
+                                        <p:cTn id="12" dur="1" fill="hold">
+                                          <p:stCondLst>
+                                            <p:cond delay="0"/>
+                                          </p:stCondLst>
+                                        </p:cTn>
+                                        <p:tgtEl>
+                                          <p:spTgt spid="4"/>
+                                        </p:tgtEl>
+                                        <p:attrNameLst>
+                                          <p:attrName>style.visibility</p:attrName>
+                                        </p:attrNameLst>
+                                      </p:cBhvr>
+                                      <p:to>
+                                        <p:strVal val="visible"/>
+                                      </p:to>
+                                    </p:set>
+                                  </p:childTnLst>
+                                </p:cTn>
+                              </p:par>
+                              <p:par>
+                                <p:cTn id="13" presetID="1" presetClass="entr" presetSubtype="0" fill="hold" nodeType="withEffect">
+                                  <p:stCondLst>
+                                    <p:cond delay="0"/>
+                                  </p:stCondLst>
+                                  <p:childTnLst>
+                                    <p:set>
+                                      <p:cBhvr>
+                                        <p:cTn id="14" dur="1" fill="hold">
+                                          <p:stCondLst>
+                                            <p:cond delay="0"/>
+                                          </p:stCondLst>
+                                        </p:cTn>
+                                        <p:tgtEl>
+                                          <p:spTgt spid="3078"/>
+                                        </p:tgtEl>
+                                        <p:attrNameLst>
+                                          <p:attrName>style.visibility</p:attrName>
+                                        </p:attrNameLst>
+                                      </p:cBhvr>
+                                      <p:to>
+                                        <p:strVal val="visible"/>
+                                      </p:to>
+                                    </p:set>
+                                  </p:childTnLst>
+                                </p:cTn>
+                              </p:par>
+                            </p:childTnLst>
+                          </p:cTn>
+                        </p:par>
+                      </p:childTnLst>
+                    </p:cTn>
+                  </p:par>
+                  <p:par>
+                    <p:cTn id="15" fill="hold">
+                      <p:stCondLst>
+                        <p:cond delay="indefinite"/>
+                      </p:stCondLst>
+                      <p:childTnLst>
+                        <p:par>
+                          <p:cTn id="16" fill="hold">
+                            <p:stCondLst>
+                              <p:cond delay="0"/>
+                            </p:stCondLst>
+                            <p:childTnLst>
+                              <p:par>
+                                <p:cTn id="17" presetID="1" presetClass="entr" presetSubtype="0" fill="hold" nodeType="clickEffect">
+                                  <p:stCondLst>
+                                    <p:cond delay="0"/>
+                                  </p:stCondLst>
+                                  <p:childTnLst>
+                                    <p:set>
+                                      <p:cBhvr>
+                                        <p:cTn id="18" dur="1" fill="hold">
+                                          <p:stCondLst>
+                                            <p:cond delay="0"/>
+                                          </p:stCondLst>
+                                        </p:cTn>
+                                        <p:tgtEl>
+                                          <p:spTgt spid="3080"/>
+                                        </p:tgtEl>
+                                        <p:attrNameLst>
+                                          <p:attrName>style.visibility</p:attrName>
+                                        </p:attrNameLst>
+                                      </p:cBhvr>
+                                      <p:to>
+                                        <p:strVal val="visible"/>
+                                      </p:to>
+                                    </p:set>
+                                  </p:childTnLst>
+                                </p:cTn>
+                              </p:par>
+                            </p:childTnLst>
+                          </p:cTn>
+                        </p:par>
+                      </p:childTnLst>
+                    </p:cTn>
+                  </p:par>
+                  <p:par>
+                    <p:cTn id="19" fill="hold">
+                      <p:stCondLst>
+                        <p:cond delay="indefinite"/>
+                      </p:stCondLst>
+                      <p:childTnLst>
+                        <p:par>
+                          <p:cTn id="20" fill="hold">
+                            <p:stCondLst>
+                              <p:cond delay="0"/>
+                            </p:stCondLst>
+                            <p:childTnLst>
+                              <p:par>
+                                <p:cTn id="21" presetID="1" presetClass="entr" presetSubtype="0" fill="hold" grpId="0" nodeType="clickEffect">
+                                  <p:stCondLst>
+                                    <p:cond delay="0"/>
+                                  </p:stCondLst>
+                                  <p:childTnLst>
+                                    <p:set>
+                                      <p:cBhvr>
+                                        <p:cTn id="22" dur="1" fill="hold">
+                                          <p:stCondLst>
+                                            <p:cond delay="0"/>
+                                          </p:stCondLst>
+                                        </p:cTn>
+                                        <p:tgtEl>
+                                          <p:spTgt spid="7"/>
+                                        </p:tgtEl>
+                                        <p:attrNameLst>
+                                          <p:attrName>style.visibility</p:attrName>
+                                        </p:attrNameLst>
+                                      </p:cBhvr>
+                                      <p:to>
+                                        <p:strVal val="visible"/>
+                                      </p:to>
+                                    </p:set>
+                                  </p:childTnLst>
+                                </p:cTn>
+                              </p:par>
+                            </p:childTnLst>
+                          </p:cTn>
+                        </p:par>
+                      </p:childTnLst>
+                    </p:cTn>
+                  </p:par>
+                </p:childTnLst>
+              </p:cTn>
+              <p:prevCondLst>
+                <p:cond evt="onPrev" delay="0">
+                  <p:tgtEl>
+                    <p:sldTgt/>
+                  </p:tgtEl>
+                </p:cond>
+              </p:prevCondLst>
+              <p:nextCondLst>
+                <p:cond evt="onNext" delay="0">
+                  <p:tgtEl>
+                    <p:sldTgt/>
+                  </p:tgtEl>
+                </p:cond>
+              </p:nextCondLst>
+            </p:seq>
+          </p:childTnLst>
+        </p:cTn>
+      </p:par>
+    </p:tnLst>
+    <p:bldLst>
+      <p:bldP spid="3" grpId="0"/>
+      <p:bldP spid="4" grpId="0"/>
+      <p:bldP spid="7" grpId="0"/>
+    </p:bldLst>
+  </p:timing>
+</p:sld>
+</file>
+
+<file path=ppt/slides/slide16.xml><?xml version="1.0" encoding="utf-8"?>
+<p:sld xmlns:a="http://schemas.openxmlformats.org/drawingml/2006/main" xmlns:r="http://schemas.openxmlformats.org/officeDocument/2006/relationships" xmlns:p="http://schemas.openxmlformats.org/presentationml/2006/main">
+  <p:cSld>
+    <p:spTree>
+      <p:nvGrpSpPr>
+        <p:cNvPr id="1" name=""/>
+        <p:cNvGrpSpPr/>
+        <p:nvPr/>
+      </p:nvGrpSpPr>
+      <p:grpSpPr>
+        <a:xfrm>
+          <a:off x="0" y="0"/>
+          <a:ext cx="0" cy="0"/>
+          <a:chOff x="0" y="0"/>
+          <a:chExt cx="0" cy="0"/>
+        </a:xfrm>
+      </p:grpSpPr>
+      <p:sp>
+        <p:nvSpPr>
+          <p:cNvPr id="2" name="Title 1">
+            <a:extLst>
+              <a:ext uri="{FF2B5EF4-FFF2-40B4-BE49-F238E27FC236}">
+                <a16:creationId xmlns:a16="http://schemas.microsoft.com/office/drawing/2014/main" id="{C4BD1885-EA7F-98E0-C057-D127F56B939D}"/>
+              </a:ext>
+            </a:extLst>
+          </p:cNvPr>
+          <p:cNvSpPr>
+            <a:spLocks noGrp="1"/>
+          </p:cNvSpPr>
+          <p:nvPr>
+            <p:ph type="title"/>
+          </p:nvPr>
+        </p:nvSpPr>
+        <p:spPr/>
+        <p:txBody>
+          <a:bodyPr/>
+          <a:lstStyle/>
+          <a:p>
+            <a:r>
+              <a:rPr lang="en-US" dirty="0"/>
+              <a:t>Let’s begin with windows Folk</a:t>
+            </a:r>
+          </a:p>
+        </p:txBody>
+      </p:sp>
+      <p:sp>
+        <p:nvSpPr>
+          <p:cNvPr id="3" name="TextBox 2">
+            <a:extLst>
+              <a:ext uri="{FF2B5EF4-FFF2-40B4-BE49-F238E27FC236}">
+                <a16:creationId xmlns:a16="http://schemas.microsoft.com/office/drawing/2014/main" id="{FAF30AEA-E84B-C73B-835A-F4A25C2598CD}"/>
+              </a:ext>
+            </a:extLst>
+          </p:cNvPr>
+          <p:cNvSpPr txBox="1"/>
+          <p:nvPr/>
+        </p:nvSpPr>
+        <p:spPr>
+          <a:xfrm>
+            <a:off x="2619632" y="3015049"/>
+            <a:ext cx="6786217" cy="1477328"/>
+          </a:xfrm>
+          <a:prstGeom prst="rect">
+            <a:avLst/>
+          </a:prstGeom>
+          <a:noFill/>
+        </p:spPr>
+        <p:txBody>
+          <a:bodyPr wrap="none" rtlCol="0">
+            <a:spAutoFit/>
+          </a:bodyPr>
+          <a:lstStyle/>
+          <a:p>
+            <a:pPr marL="342900" indent="-342900">
+              <a:buAutoNum type="arabicPeriod"/>
+            </a:pPr>
+            <a:r>
+              <a:rPr lang="en-US" dirty="0" err="1"/>
+              <a:t>wsl</a:t>
+            </a:r>
+            <a:endParaRPr lang="en-US" dirty="0"/>
+          </a:p>
+          <a:p>
+            <a:pPr marL="342900" indent="-342900">
+              <a:buAutoNum type="arabicPeriod"/>
+            </a:pPr>
+            <a:r>
+              <a:rPr lang="en-US" dirty="0"/>
+              <a:t>If </a:t>
+            </a:r>
+            <a:r>
+              <a:rPr lang="en-US" dirty="0" err="1"/>
+              <a:t>wsl</a:t>
+            </a:r>
+            <a:r>
+              <a:rPr lang="en-US" dirty="0"/>
+              <a:t> doesn’t work: </a:t>
+            </a:r>
+            <a:r>
+              <a:rPr lang="en-US" dirty="0" err="1"/>
+              <a:t>cmd</a:t>
+            </a:r>
+            <a:r>
+              <a:rPr lang="en-US" dirty="0"/>
+              <a:t> -&gt; </a:t>
+            </a:r>
+            <a:r>
+              <a:rPr lang="en-US" dirty="0" err="1"/>
+              <a:t>wsl</a:t>
+            </a:r>
+            <a:r>
+              <a:rPr lang="en-US" dirty="0"/>
+              <a:t> –install</a:t>
+            </a:r>
+          </a:p>
+          <a:p>
+            <a:pPr marL="342900" indent="-342900">
+              <a:buAutoNum type="arabicPeriod"/>
+            </a:pPr>
+            <a:r>
+              <a:rPr lang="en-US" dirty="0"/>
+              <a:t>Then do bash class</a:t>
+            </a:r>
+          </a:p>
+          <a:p>
+            <a:pPr marL="342900" indent="-342900">
+              <a:buAutoNum type="arabicPeriod"/>
+            </a:pPr>
+            <a:r>
+              <a:rPr lang="en-US" dirty="0"/>
+              <a:t>When we reach python/git, Windows folk need special treatment</a:t>
+            </a:r>
+          </a:p>
+          <a:p>
+            <a:pPr marL="342900" indent="-342900">
+              <a:buAutoNum type="arabicPeriod"/>
+            </a:pPr>
+            <a:r>
+              <a:rPr lang="en-US" dirty="0"/>
+              <a:t>(git, python) – in </a:t>
+            </a:r>
+            <a:r>
+              <a:rPr lang="en-US" dirty="0" err="1"/>
+              <a:t>cmd</a:t>
+            </a:r>
+            <a:endParaRPr lang="en-US" dirty="0"/>
+          </a:p>
+        </p:txBody>
+      </p:sp>
+    </p:spTree>
+    <p:extLst>
+      <p:ext uri="{BB962C8B-B14F-4D97-AF65-F5344CB8AC3E}">
+        <p14:creationId xmlns:p14="http://schemas.microsoft.com/office/powerpoint/2010/main" val="1749487939"/>
       </p:ext>
     </p:extLst>
   </p:cSld>
